--- a/decks/output/03-staff-attendance-spotlight-v0.pptx
+++ b/decks/output/03-staff-attendance-spotlight-v0.pptx
@@ -20,11 +20,6 @@
     <p:sldId id="268" r:id="rId19"/>
     <p:sldId id="269" r:id="rId20"/>
     <p:sldId id="270" r:id="rId21"/>
-    <p:sldId id="271" r:id="rId22"/>
-    <p:sldId id="272" r:id="rId23"/>
-    <p:sldId id="273" r:id="rId24"/>
-    <p:sldId id="274" r:id="rId25"/>
-    <p:sldId id="275" r:id="rId26"/>
   </p:sldIdLst>
   <p:sldSz cx="12192000" cy="6858000" type="screen4x3"/>
   <p:notesSz cx="6858000" cy="9144000"/>
@@ -3352,7 +3347,7 @@
     <p:bg>
       <p:bgPr>
         <a:solidFill>
-          <a:srgbClr val="0E1411"/>
+          <a:srgbClr val="F6F1E7"/>
         </a:solidFill>
         <a:effectLst/>
       </p:bgPr>
@@ -3364,40 +3359,16 @@
         <p:nvPr/>
       </p:nvGrpSpPr>
       <p:grpSpPr/>
-      <p:pic>
-        <p:nvPicPr>
-          <p:cNvPr id="2" name="Picture 1" descr="kente-texture-overlay.png"/>
-          <p:cNvPicPr>
-            <a:picLocks noChangeAspect="1"/>
-          </p:cNvPicPr>
-          <p:nvPr/>
-        </p:nvPicPr>
-        <p:blipFill>
-          <a:blip r:embed="rId2"/>
-          <a:stretch>
-            <a:fillRect/>
-          </a:stretch>
-        </p:blipFill>
-        <p:spPr>
-          <a:xfrm>
-            <a:off x="0" y="0"/>
-            <a:ext cx="12192000" cy="6858000"/>
-          </a:xfrm>
-          <a:prstGeom prst="rect">
-            <a:avLst/>
-          </a:prstGeom>
-        </p:spPr>
-      </p:pic>
-      <p:sp>
-        <p:nvSpPr>
-          <p:cNvPr id="3" name="TextBox 2"/>
+      <p:sp>
+        <p:nvSpPr>
+          <p:cNvPr id="2" name="TextBox 1"/>
           <p:cNvSpPr txBox="1"/>
           <p:nvPr/>
         </p:nvSpPr>
         <p:spPr>
           <a:xfrm>
-            <a:off x="800000" y="1500000"/>
-            <a:ext cx="10500000" cy="3500000"/>
+            <a:off x="800000" y="500000"/>
+            <a:ext cx="10500000" cy="700000"/>
           </a:xfrm>
           <a:prstGeom prst="rect">
             <a:avLst/>
@@ -3410,15 +3381,69 @@
           </a:bodyPr>
           <a:lstStyle/>
           <a:p>
+            <a:pPr algn="l"/>
+            <a:r>
+              <a:rPr sz="3200" b="1">
+                <a:solidFill>
+                  <a:srgbClr val="0E1411"/>
+                </a:solidFill>
+                <a:latin typeface="DM Sans"/>
+              </a:rPr>
+              <a:t>Streak banner</a:t>
+            </a:r>
+          </a:p>
+        </p:txBody>
+      </p:sp>
+      <p:sp>
+        <p:nvSpPr>
+          <p:cNvPr id="3" name="Rectangle 2"/>
+          <p:cNvSpPr/>
+          <p:nvPr/>
+        </p:nvSpPr>
+        <p:spPr>
+          <a:xfrm>
+            <a:off x="800000" y="1500000"/>
+            <a:ext cx="5800000" cy="4500000"/>
+          </a:xfrm>
+          <a:prstGeom prst="rect">
+            <a:avLst/>
+          </a:prstGeom>
+          <a:solidFill>
+            <a:srgbClr val="FBF7EF"/>
+          </a:solidFill>
+          <a:ln>
+            <a:solidFill>
+              <a:srgbClr val="D8CFBE"/>
+            </a:solidFill>
+          </a:ln>
+        </p:spPr>
+        <p:style>
+          <a:lnRef idx="1">
+            <a:schemeClr val="accent1"/>
+          </a:lnRef>
+          <a:fillRef idx="3">
+            <a:schemeClr val="accent1"/>
+          </a:fillRef>
+          <a:effectRef idx="2">
+            <a:schemeClr val="accent1"/>
+          </a:effectRef>
+          <a:fontRef idx="minor">
+            <a:schemeClr val="lt1"/>
+          </a:fontRef>
+        </p:style>
+        <p:txBody>
+          <a:bodyPr rtlCol="0" anchor="ctr"/>
+          <a:lstStyle/>
+          <a:p>
             <a:pPr algn="ctr"/>
             <a:r>
-              <a:rPr sz="22000" b="1">
-                <a:solidFill>
-                  <a:srgbClr val="C9A14A"/>
-                </a:solidFill>
-                <a:latin typeface="Playfair Display"/>
+              <a:rPr sz="1100">
+                <a:solidFill>
+                  <a:srgbClr val="8B6B22"/>
+                </a:solidFill>
+                <a:latin typeface="DM Sans"/>
               </a:rPr>
-              <a:t>&lt;N04&gt;</a:t>
+              <a:t>[REPLACE: S12-streak-banner.png]</a:t>
             </a:r>
           </a:p>
         </p:txBody>
@@ -3431,8 +3456,8 @@
         </p:nvSpPr>
         <p:spPr>
           <a:xfrm>
-            <a:off x="800000" y="5300000"/>
-            <a:ext cx="10500000" cy="700000"/>
+            <a:off x="7100000" y="1500000"/>
+            <a:ext cx="4200000" cy="1100000"/>
           </a:xfrm>
           <a:prstGeom prst="rect">
             <a:avLst/>
@@ -3445,15 +3470,15 @@
           </a:bodyPr>
           <a:lstStyle/>
           <a:p>
-            <a:pPr algn="ctr"/>
-            <a:r>
-              <a:rPr sz="2800" b="0">
-                <a:solidFill>
-                  <a:srgbClr val="F6F1E7"/>
+            <a:pPr algn="l"/>
+            <a:r>
+              <a:rPr sz="1600" b="0">
+                <a:solidFill>
+                  <a:srgbClr val="1A1714"/>
                 </a:solidFill>
                 <a:latin typeface="DM Sans"/>
               </a:rPr>
-              <a:t>First-try success rate inside the geofence.</a:t>
+              <a:t>①  Yesterday counts. Today builds. Tomorrow continues.</a:t>
             </a:r>
           </a:p>
         </p:txBody>
@@ -3466,8 +3491,8 @@
         </p:nvSpPr>
         <p:spPr>
           <a:xfrm>
-            <a:off x="8000000" y="6500000"/>
-            <a:ext cx="4000000" cy="300000"/>
+            <a:off x="7100000" y="2800000"/>
+            <a:ext cx="4200000" cy="1100000"/>
           </a:xfrm>
           <a:prstGeom prst="rect">
             <a:avLst/>
@@ -3480,15 +3505,120 @@
           </a:bodyPr>
           <a:lstStyle/>
           <a:p>
-            <a:pPr algn="r"/>
-            <a:r>
-              <a:rPr sz="1100" b="0">
-                <a:solidFill>
-                  <a:srgbClr val="D8CFBE"/>
+            <a:pPr algn="l"/>
+            <a:r>
+              <a:rPr sz="1600" b="0">
+                <a:solidFill>
+                  <a:srgbClr val="1A1714"/>
                 </a:solidFill>
                 <a:latin typeface="DM Sans"/>
               </a:rPr>
-              <a:t>03 · Staff Attendance · 10/20</a:t>
+              <a:t>②  Best-ever displayed alongside current.</a:t>
+            </a:r>
+          </a:p>
+        </p:txBody>
+      </p:sp>
+      <p:sp>
+        <p:nvSpPr>
+          <p:cNvPr id="6" name="TextBox 5"/>
+          <p:cNvSpPr txBox="1"/>
+          <p:nvPr/>
+        </p:nvSpPr>
+        <p:spPr>
+          <a:xfrm>
+            <a:off x="7100000" y="4100000"/>
+            <a:ext cx="4200000" cy="1100000"/>
+          </a:xfrm>
+          <a:prstGeom prst="rect">
+            <a:avLst/>
+          </a:prstGeom>
+          <a:noFill/>
+        </p:spPr>
+        <p:txBody>
+          <a:bodyPr wrap="square">
+            <a:spAutoFit/>
+          </a:bodyPr>
+          <a:lstStyle/>
+          <a:p>
+            <a:pPr algn="l"/>
+            <a:r>
+              <a:rPr sz="1600" b="0">
+                <a:solidFill>
+                  <a:srgbClr val="1A1714"/>
+                </a:solidFill>
+                <a:latin typeface="DM Sans"/>
+              </a:rPr>
+              <a:t>③  Quietly celebratory, not gamified-to-death.</a:t>
+            </a:r>
+          </a:p>
+        </p:txBody>
+      </p:sp>
+      <p:sp>
+        <p:nvSpPr>
+          <p:cNvPr id="7" name="TextBox 6"/>
+          <p:cNvSpPr txBox="1"/>
+          <p:nvPr/>
+        </p:nvSpPr>
+        <p:spPr>
+          <a:xfrm>
+            <a:off x="800000" y="6100000"/>
+            <a:ext cx="10500000" cy="300000"/>
+          </a:xfrm>
+          <a:prstGeom prst="rect">
+            <a:avLst/>
+          </a:prstGeom>
+          <a:noFill/>
+        </p:spPr>
+        <p:txBody>
+          <a:bodyPr wrap="square">
+            <a:spAutoFit/>
+          </a:bodyPr>
+          <a:lstStyle/>
+          <a:p>
+            <a:pPr algn="l"/>
+            <a:r>
+              <a:rPr sz="1100" b="0">
+                <a:solidFill>
+                  <a:srgbClr val="8B6B22"/>
+                </a:solidFill>
+                <a:latin typeface="DM Sans"/>
+              </a:rPr>
+              <a:t>Clock page hero — streak module.</a:t>
+            </a:r>
+          </a:p>
+        </p:txBody>
+      </p:sp>
+      <p:sp>
+        <p:nvSpPr>
+          <p:cNvPr id="8" name="TextBox 7"/>
+          <p:cNvSpPr txBox="1"/>
+          <p:nvPr/>
+        </p:nvSpPr>
+        <p:spPr>
+          <a:xfrm>
+            <a:off x="8000000" y="6500000"/>
+            <a:ext cx="4000000" cy="300000"/>
+          </a:xfrm>
+          <a:prstGeom prst="rect">
+            <a:avLst/>
+          </a:prstGeom>
+          <a:noFill/>
+        </p:spPr>
+        <p:txBody>
+          <a:bodyPr wrap="square">
+            <a:spAutoFit/>
+          </a:bodyPr>
+          <a:lstStyle/>
+          <a:p>
+            <a:pPr algn="r"/>
+            <a:r>
+              <a:rPr sz="1100" b="0">
+                <a:solidFill>
+                  <a:srgbClr val="D8CFBE"/>
+                </a:solidFill>
+                <a:latin typeface="DM Sans"/>
+              </a:rPr>
+              <a:t>03 · Staff Attendance · 10/15</a:t>
             </a:r>
           </a:p>
         </p:txBody>
@@ -3549,7 +3679,7 @@
                 </a:solidFill>
                 <a:latin typeface="Playfair Display"/>
               </a:rPr>
-              <a:t>Streaks turn habit into recognition.</a:t>
+              <a:t>Absence is a flow, not a phone call.</a:t>
             </a:r>
           </a:p>
         </p:txBody>
@@ -3608,7 +3738,7 @@
                 </a:solidFill>
                 <a:latin typeface="DM Sans"/>
               </a:rPr>
-              <a:t>Consecutive working-day counter. "Best-ever" stays remembered.</a:t>
+              <a:t>Sick, family emergency, transport, other. Optional note. Optional return date.</a:t>
             </a:r>
           </a:p>
         </p:txBody>
@@ -3643,7 +3773,7 @@
                 </a:solidFill>
                 <a:latin typeface="DM Sans"/>
               </a:rPr>
-              <a:t>03 · Staff Attendance · 11/20</a:t>
+              <a:t>03 · Staff Attendance · 11/15</a:t>
             </a:r>
           </a:p>
         </p:txBody>
@@ -3682,8 +3812,8 @@
         </p:nvSpPr>
         <p:spPr>
           <a:xfrm>
-            <a:off x="800000" y="500000"/>
-            <a:ext cx="10500000" cy="700000"/>
+            <a:off x="1200000" y="2200000"/>
+            <a:ext cx="9700000" cy="1500000"/>
           </a:xfrm>
           <a:prstGeom prst="rect">
             <a:avLst/>
@@ -3696,73 +3826,43 @@
           </a:bodyPr>
           <a:lstStyle/>
           <a:p>
-            <a:pPr algn="l"/>
-            <a:r>
-              <a:rPr sz="3200" b="1">
+            <a:pPr algn="ctr"/>
+            <a:r>
+              <a:rPr sz="4400" b="1">
                 <a:solidFill>
                   <a:srgbClr val="0E1411"/>
                 </a:solidFill>
-                <a:latin typeface="DM Sans"/>
+                <a:latin typeface="Playfair Display"/>
               </a:rPr>
-              <a:t>Streak banner</a:t>
-            </a:r>
-          </a:p>
-        </p:txBody>
-      </p:sp>
-      <p:sp>
-        <p:nvSpPr>
-          <p:cNvPr id="3" name="Rectangle 2"/>
-          <p:cNvSpPr/>
-          <p:nvPr/>
-        </p:nvSpPr>
-        <p:spPr>
-          <a:xfrm>
-            <a:off x="800000" y="1500000"/>
-            <a:ext cx="5800000" cy="4500000"/>
-          </a:xfrm>
-          <a:prstGeom prst="rect">
-            <a:avLst/>
-          </a:prstGeom>
-          <a:solidFill>
-            <a:srgbClr val="FBF7EF"/>
-          </a:solidFill>
-          <a:ln>
-            <a:solidFill>
-              <a:srgbClr val="D8CFBE"/>
-            </a:solidFill>
-          </a:ln>
-        </p:spPr>
-        <p:style>
-          <a:lnRef idx="1">
-            <a:schemeClr val="accent1"/>
-          </a:lnRef>
-          <a:fillRef idx="3">
-            <a:schemeClr val="accent1"/>
-          </a:fillRef>
-          <a:effectRef idx="2">
-            <a:schemeClr val="accent1"/>
-          </a:effectRef>
-          <a:fontRef idx="minor">
-            <a:schemeClr val="lt1"/>
-          </a:fontRef>
-        </p:style>
-        <p:txBody>
-          <a:bodyPr rtlCol="0" anchor="ctr"/>
-          <a:lstStyle/>
-          <a:p>
-            <a:pPr algn="ctr"/>
-            <a:r>
-              <a:rPr sz="1100">
-                <a:solidFill>
-                  <a:srgbClr val="8B6B22"/>
-                </a:solidFill>
-                <a:latin typeface="DM Sans"/>
-              </a:rPr>
-              <a:t>[REPLACE: S12-streak-banner.png]</a:t>
-            </a:r>
-          </a:p>
-        </p:txBody>
-      </p:sp>
+              <a:t>Leadership reads the summary, not the spreadsheet.</a:t>
+            </a:r>
+          </a:p>
+        </p:txBody>
+      </p:sp>
+      <p:pic>
+        <p:nvPicPr>
+          <p:cNvPr id="3" name="Picture 2" descr="gold-deco-hairline.png"/>
+          <p:cNvPicPr>
+            <a:picLocks noChangeAspect="1"/>
+          </p:cNvPicPr>
+          <p:nvPr/>
+        </p:nvPicPr>
+        <p:blipFill>
+          <a:blip r:embed="rId2"/>
+          <a:stretch>
+            <a:fillRect/>
+          </a:stretch>
+        </p:blipFill>
+        <p:spPr>
+          <a:xfrm>
+            <a:off x="5896000" y="3800000"/>
+            <a:ext cx="400000" cy="20000"/>
+          </a:xfrm>
+          <a:prstGeom prst="rect">
+            <a:avLst/>
+          </a:prstGeom>
+        </p:spPr>
+      </p:pic>
       <p:sp>
         <p:nvSpPr>
           <p:cNvPr id="4" name="TextBox 3"/>
@@ -3771,8 +3871,8 @@
         </p:nvSpPr>
         <p:spPr>
           <a:xfrm>
-            <a:off x="7100000" y="1500000"/>
-            <a:ext cx="4200000" cy="1100000"/>
+            <a:off x="1500000" y="4100000"/>
+            <a:ext cx="9100000" cy="1200000"/>
           </a:xfrm>
           <a:prstGeom prst="rect">
             <a:avLst/>
@@ -3785,15 +3885,15 @@
           </a:bodyPr>
           <a:lstStyle/>
           <a:p>
-            <a:pPr algn="l"/>
-            <a:r>
-              <a:rPr sz="1600" b="0">
+            <a:pPr algn="ctr"/>
+            <a:r>
+              <a:rPr sz="2200" b="0">
                 <a:solidFill>
                   <a:srgbClr val="1A1714"/>
                 </a:solidFill>
                 <a:latin typeface="DM Sans"/>
               </a:rPr>
-              <a:t>①  Yesterday counts. Today builds. Tomorrow continues.</a:t>
+              <a:t>Telegram message at 9:00 AM weekdays. Per-directorate breakdown. One screen.</a:t>
             </a:r>
           </a:p>
         </p:txBody>
@@ -3806,8 +3906,8 @@
         </p:nvSpPr>
         <p:spPr>
           <a:xfrm>
-            <a:off x="7100000" y="2800000"/>
-            <a:ext cx="4200000" cy="1100000"/>
+            <a:off x="8000000" y="6500000"/>
+            <a:ext cx="4000000" cy="300000"/>
           </a:xfrm>
           <a:prstGeom prst="rect">
             <a:avLst/>
@@ -3820,120 +3920,15 @@
           </a:bodyPr>
           <a:lstStyle/>
           <a:p>
-            <a:pPr algn="l"/>
-            <a:r>
-              <a:rPr sz="1600" b="0">
-                <a:solidFill>
-                  <a:srgbClr val="1A1714"/>
+            <a:pPr algn="r"/>
+            <a:r>
+              <a:rPr sz="1100" b="0">
+                <a:solidFill>
+                  <a:srgbClr val="D8CFBE"/>
                 </a:solidFill>
                 <a:latin typeface="DM Sans"/>
               </a:rPr>
-              <a:t>②  Best-ever displayed alongside current.</a:t>
-            </a:r>
-          </a:p>
-        </p:txBody>
-      </p:sp>
-      <p:sp>
-        <p:nvSpPr>
-          <p:cNvPr id="6" name="TextBox 5"/>
-          <p:cNvSpPr txBox="1"/>
-          <p:nvPr/>
-        </p:nvSpPr>
-        <p:spPr>
-          <a:xfrm>
-            <a:off x="7100000" y="4100000"/>
-            <a:ext cx="4200000" cy="1100000"/>
-          </a:xfrm>
-          <a:prstGeom prst="rect">
-            <a:avLst/>
-          </a:prstGeom>
-          <a:noFill/>
-        </p:spPr>
-        <p:txBody>
-          <a:bodyPr wrap="square">
-            <a:spAutoFit/>
-          </a:bodyPr>
-          <a:lstStyle/>
-          <a:p>
-            <a:pPr algn="l"/>
-            <a:r>
-              <a:rPr sz="1600" b="0">
-                <a:solidFill>
-                  <a:srgbClr val="1A1714"/>
-                </a:solidFill>
-                <a:latin typeface="DM Sans"/>
-              </a:rPr>
-              <a:t>③  Quietly celebratory, not gamified-to-death.</a:t>
-            </a:r>
-          </a:p>
-        </p:txBody>
-      </p:sp>
-      <p:sp>
-        <p:nvSpPr>
-          <p:cNvPr id="7" name="TextBox 6"/>
-          <p:cNvSpPr txBox="1"/>
-          <p:nvPr/>
-        </p:nvSpPr>
-        <p:spPr>
-          <a:xfrm>
-            <a:off x="800000" y="6100000"/>
-            <a:ext cx="10500000" cy="300000"/>
-          </a:xfrm>
-          <a:prstGeom prst="rect">
-            <a:avLst/>
-          </a:prstGeom>
-          <a:noFill/>
-        </p:spPr>
-        <p:txBody>
-          <a:bodyPr wrap="square">
-            <a:spAutoFit/>
-          </a:bodyPr>
-          <a:lstStyle/>
-          <a:p>
-            <a:pPr algn="l"/>
-            <a:r>
-              <a:rPr sz="1100" b="0">
-                <a:solidFill>
-                  <a:srgbClr val="8B6B22"/>
-                </a:solidFill>
-                <a:latin typeface="DM Sans"/>
-              </a:rPr>
-              <a:t>Clock page hero — streak module.</a:t>
-            </a:r>
-          </a:p>
-        </p:txBody>
-      </p:sp>
-      <p:sp>
-        <p:nvSpPr>
-          <p:cNvPr id="8" name="TextBox 7"/>
-          <p:cNvSpPr txBox="1"/>
-          <p:nvPr/>
-        </p:nvSpPr>
-        <p:spPr>
-          <a:xfrm>
-            <a:off x="8000000" y="6500000"/>
-            <a:ext cx="4000000" cy="300000"/>
-          </a:xfrm>
-          <a:prstGeom prst="rect">
-            <a:avLst/>
-          </a:prstGeom>
-          <a:noFill/>
-        </p:spPr>
-        <p:txBody>
-          <a:bodyPr wrap="square">
-            <a:spAutoFit/>
-          </a:bodyPr>
-          <a:lstStyle/>
-          <a:p>
-            <a:pPr algn="r"/>
-            <a:r>
-              <a:rPr sz="1100" b="0">
-                <a:solidFill>
-                  <a:srgbClr val="D8CFBE"/>
-                </a:solidFill>
-                <a:latin typeface="DM Sans"/>
-              </a:rPr>
-              <a:t>03 · Staff Attendance · 12/20</a:t>
+              <a:t>03 · Staff Attendance · 12/15</a:t>
             </a:r>
           </a:p>
         </p:txBody>
@@ -3994,7 +3989,7 @@
                 </a:solidFill>
                 <a:latin typeface="Playfair Display"/>
               </a:rPr>
-              <a:t>Absence is a flow, not a phone call.</a:t>
+              <a:t>One staff voice on what's changed.</a:t>
             </a:r>
           </a:p>
         </p:txBody>
@@ -4053,7 +4048,7 @@
                 </a:solidFill>
                 <a:latin typeface="DM Sans"/>
               </a:rPr>
-              <a:t>Sick, family emergency, transport, other. Optional note. Optional return date.</a:t>
+              <a:t>"&lt;Q05&gt;"</a:t>
             </a:r>
           </a:p>
         </p:txBody>
@@ -4088,7 +4083,7 @@
                 </a:solidFill>
                 <a:latin typeface="DM Sans"/>
               </a:rPr>
-              <a:t>03 · Staff Attendance · 13/20</a:t>
+              <a:t>03 · Staff Attendance · 13/15</a:t>
             </a:r>
           </a:p>
         </p:txBody>
@@ -4107,7 +4102,7 @@
     <p:bg>
       <p:bgPr>
         <a:solidFill>
-          <a:srgbClr val="F6F1E7"/>
+          <a:srgbClr val="0E1411"/>
         </a:solidFill>
         <a:effectLst/>
       </p:bgPr>
@@ -4119,16 +4114,40 @@
         <p:nvPr/>
       </p:nvGrpSpPr>
       <p:grpSpPr/>
-      <p:sp>
-        <p:nvSpPr>
-          <p:cNvPr id="2" name="TextBox 1"/>
+      <p:pic>
+        <p:nvPicPr>
+          <p:cNvPr id="2" name="Picture 1" descr="kente-texture-overlay.png"/>
+          <p:cNvPicPr>
+            <a:picLocks noChangeAspect="1"/>
+          </p:cNvPicPr>
+          <p:nvPr/>
+        </p:nvPicPr>
+        <p:blipFill>
+          <a:blip r:embed="rId2"/>
+          <a:stretch>
+            <a:fillRect/>
+          </a:stretch>
+        </p:blipFill>
+        <p:spPr>
+          <a:xfrm>
+            <a:off x="0" y="0"/>
+            <a:ext cx="12192000" cy="6858000"/>
+          </a:xfrm>
+          <a:prstGeom prst="rect">
+            <a:avLst/>
+          </a:prstGeom>
+        </p:spPr>
+      </p:pic>
+      <p:sp>
+        <p:nvSpPr>
+          <p:cNvPr id="3" name="TextBox 2"/>
           <p:cNvSpPr txBox="1"/>
           <p:nvPr/>
         </p:nvSpPr>
         <p:spPr>
           <a:xfrm>
-            <a:off x="800000" y="500000"/>
-            <a:ext cx="10500000" cy="700000"/>
+            <a:off x="1600000" y="2800000"/>
+            <a:ext cx="8900000" cy="2000000"/>
           </a:xfrm>
           <a:prstGeom prst="rect">
             <a:avLst/>
@@ -4141,244 +4160,15 @@
           </a:bodyPr>
           <a:lstStyle/>
           <a:p>
-            <a:pPr algn="l"/>
-            <a:r>
-              <a:rPr sz="3200" b="1">
-                <a:solidFill>
-                  <a:srgbClr val="0E1411"/>
-                </a:solidFill>
-                <a:latin typeface="DM Sans"/>
+            <a:pPr algn="ctr"/>
+            <a:r>
+              <a:rPr sz="4400" b="0">
+                <a:solidFill>
+                  <a:srgbClr val="F6F1E7"/>
+                </a:solidFill>
+                <a:latin typeface="Playfair Display"/>
               </a:rPr>
-              <a:t>Absence notice</a:t>
-            </a:r>
-          </a:p>
-        </p:txBody>
-      </p:sp>
-      <p:sp>
-        <p:nvSpPr>
-          <p:cNvPr id="3" name="Rectangle 2"/>
-          <p:cNvSpPr/>
-          <p:nvPr/>
-        </p:nvSpPr>
-        <p:spPr>
-          <a:xfrm>
-            <a:off x="800000" y="1500000"/>
-            <a:ext cx="5800000" cy="4500000"/>
-          </a:xfrm>
-          <a:prstGeom prst="rect">
-            <a:avLst/>
-          </a:prstGeom>
-          <a:solidFill>
-            <a:srgbClr val="FBF7EF"/>
-          </a:solidFill>
-          <a:ln>
-            <a:solidFill>
-              <a:srgbClr val="D8CFBE"/>
-            </a:solidFill>
-          </a:ln>
-        </p:spPr>
-        <p:style>
-          <a:lnRef idx="1">
-            <a:schemeClr val="accent1"/>
-          </a:lnRef>
-          <a:fillRef idx="3">
-            <a:schemeClr val="accent1"/>
-          </a:fillRef>
-          <a:effectRef idx="2">
-            <a:schemeClr val="accent1"/>
-          </a:effectRef>
-          <a:fontRef idx="minor">
-            <a:schemeClr val="lt1"/>
-          </a:fontRef>
-        </p:style>
-        <p:txBody>
-          <a:bodyPr rtlCol="0" anchor="ctr"/>
-          <a:lstStyle/>
-          <a:p>
-            <a:pPr algn="ctr"/>
-            <a:r>
-              <a:rPr sz="1100">
-                <a:solidFill>
-                  <a:srgbClr val="8B6B22"/>
-                </a:solidFill>
-                <a:latin typeface="DM Sans"/>
-              </a:rPr>
-              <a:t>[REPLACE: S13-absence-modal.png]</a:t>
-            </a:r>
-          </a:p>
-        </p:txBody>
-      </p:sp>
-      <p:sp>
-        <p:nvSpPr>
-          <p:cNvPr id="4" name="TextBox 3"/>
-          <p:cNvSpPr txBox="1"/>
-          <p:nvPr/>
-        </p:nvSpPr>
-        <p:spPr>
-          <a:xfrm>
-            <a:off x="7100000" y="1500000"/>
-            <a:ext cx="4200000" cy="1100000"/>
-          </a:xfrm>
-          <a:prstGeom prst="rect">
-            <a:avLst/>
-          </a:prstGeom>
-          <a:noFill/>
-        </p:spPr>
-        <p:txBody>
-          <a:bodyPr wrap="square">
-            <a:spAutoFit/>
-          </a:bodyPr>
-          <a:lstStyle/>
-          <a:p>
-            <a:pPr algn="l"/>
-            <a:r>
-              <a:rPr sz="1600" b="0">
-                <a:solidFill>
-                  <a:srgbClr val="1A1714"/>
-                </a:solidFill>
-                <a:latin typeface="DM Sans"/>
-              </a:rPr>
-              <a:t>①  One self-service flow.</a:t>
-            </a:r>
-          </a:p>
-        </p:txBody>
-      </p:sp>
-      <p:sp>
-        <p:nvSpPr>
-          <p:cNvPr id="5" name="TextBox 4"/>
-          <p:cNvSpPr txBox="1"/>
-          <p:nvPr/>
-        </p:nvSpPr>
-        <p:spPr>
-          <a:xfrm>
-            <a:off x="7100000" y="2800000"/>
-            <a:ext cx="4200000" cy="1100000"/>
-          </a:xfrm>
-          <a:prstGeom prst="rect">
-            <a:avLst/>
-          </a:prstGeom>
-          <a:noFill/>
-        </p:spPr>
-        <p:txBody>
-          <a:bodyPr wrap="square">
-            <a:spAutoFit/>
-          </a:bodyPr>
-          <a:lstStyle/>
-          <a:p>
-            <a:pPr algn="l"/>
-            <a:r>
-              <a:rPr sz="1600" b="0">
-                <a:solidFill>
-                  <a:srgbClr val="1A1714"/>
-                </a:solidFill>
-                <a:latin typeface="DM Sans"/>
-              </a:rPr>
-              <a:t>②  Directors notified immediately.</a:t>
-            </a:r>
-          </a:p>
-        </p:txBody>
-      </p:sp>
-      <p:sp>
-        <p:nvSpPr>
-          <p:cNvPr id="6" name="TextBox 5"/>
-          <p:cNvSpPr txBox="1"/>
-          <p:nvPr/>
-        </p:nvSpPr>
-        <p:spPr>
-          <a:xfrm>
-            <a:off x="7100000" y="4100000"/>
-            <a:ext cx="4200000" cy="1100000"/>
-          </a:xfrm>
-          <a:prstGeom prst="rect">
-            <a:avLst/>
-          </a:prstGeom>
-          <a:noFill/>
-        </p:spPr>
-        <p:txBody>
-          <a:bodyPr wrap="square">
-            <a:spAutoFit/>
-          </a:bodyPr>
-          <a:lstStyle/>
-          <a:p>
-            <a:pPr algn="l"/>
-            <a:r>
-              <a:rPr sz="1600" b="0">
-                <a:solidFill>
-                  <a:srgbClr val="1A1714"/>
-                </a:solidFill>
-                <a:latin typeface="DM Sans"/>
-              </a:rPr>
-              <a:t>③  Morning clock-reminder suppressed automatically.</a:t>
-            </a:r>
-          </a:p>
-        </p:txBody>
-      </p:sp>
-      <p:sp>
-        <p:nvSpPr>
-          <p:cNvPr id="7" name="TextBox 6"/>
-          <p:cNvSpPr txBox="1"/>
-          <p:nvPr/>
-        </p:nvSpPr>
-        <p:spPr>
-          <a:xfrm>
-            <a:off x="800000" y="6100000"/>
-            <a:ext cx="10500000" cy="300000"/>
-          </a:xfrm>
-          <a:prstGeom prst="rect">
-            <a:avLst/>
-          </a:prstGeom>
-          <a:noFill/>
-        </p:spPr>
-        <p:txBody>
-          <a:bodyPr wrap="square">
-            <a:spAutoFit/>
-          </a:bodyPr>
-          <a:lstStyle/>
-          <a:p>
-            <a:pPr algn="l"/>
-            <a:r>
-              <a:rPr sz="1100" b="0">
-                <a:solidFill>
-                  <a:srgbClr val="8B6B22"/>
-                </a:solidFill>
-                <a:latin typeface="DM Sans"/>
-              </a:rPr>
-              <a:t>Absence modal, in-progress.</a:t>
-            </a:r>
-          </a:p>
-        </p:txBody>
-      </p:sp>
-      <p:sp>
-        <p:nvSpPr>
-          <p:cNvPr id="8" name="TextBox 7"/>
-          <p:cNvSpPr txBox="1"/>
-          <p:nvPr/>
-        </p:nvSpPr>
-        <p:spPr>
-          <a:xfrm>
-            <a:off x="8000000" y="6500000"/>
-            <a:ext cx="4000000" cy="300000"/>
-          </a:xfrm>
-          <a:prstGeom prst="rect">
-            <a:avLst/>
-          </a:prstGeom>
-          <a:noFill/>
-        </p:spPr>
-        <p:txBody>
-          <a:bodyPr wrap="square">
-            <a:spAutoFit/>
-          </a:bodyPr>
-          <a:lstStyle/>
-          <a:p>
-            <a:pPr algn="r"/>
-            <a:r>
-              <a:rPr sz="1100" b="0">
-                <a:solidFill>
-                  <a:srgbClr val="D8CFBE"/>
-                </a:solidFill>
-                <a:latin typeface="DM Sans"/>
-              </a:rPr>
-              <a:t>03 · Staff Attendance · 14/20</a:t>
+              <a:t>Attendance is dignity. SmartGate treats it that way.</a:t>
             </a:r>
           </a:p>
         </p:txBody>
@@ -4417,8 +4207,8 @@
         </p:nvSpPr>
         <p:spPr>
           <a:xfrm>
-            <a:off x="1200000" y="2200000"/>
-            <a:ext cx="9700000" cy="1500000"/>
+            <a:off x="1000000" y="800000"/>
+            <a:ext cx="10000000" cy="700000"/>
           </a:xfrm>
           <a:prstGeom prst="rect">
             <a:avLst/>
@@ -4431,7 +4221,7 @@
           </a:bodyPr>
           <a:lstStyle/>
           <a:p>
-            <a:pPr algn="ctr"/>
+            <a:pPr algn="l"/>
             <a:r>
               <a:rPr sz="4400" b="1">
                 <a:solidFill>
@@ -4439,45 +4229,21 @@
                 </a:solidFill>
                 <a:latin typeface="Playfair Display"/>
               </a:rPr>
-              <a:t>Leadership reads the summary, not the spreadsheet.</a:t>
-            </a:r>
-          </a:p>
-        </p:txBody>
-      </p:sp>
-      <p:pic>
-        <p:nvPicPr>
-          <p:cNvPr id="3" name="Picture 2" descr="gold-deco-hairline.png"/>
-          <p:cNvPicPr>
-            <a:picLocks noChangeAspect="1"/>
-          </p:cNvPicPr>
-          <p:nvPr/>
-        </p:nvPicPr>
-        <p:blipFill>
-          <a:blip r:embed="rId2"/>
-          <a:stretch>
-            <a:fillRect/>
-          </a:stretch>
-        </p:blipFill>
-        <p:spPr>
-          <a:xfrm>
-            <a:off x="5896000" y="3800000"/>
-            <a:ext cx="400000" cy="20000"/>
-          </a:xfrm>
-          <a:prstGeom prst="rect">
-            <a:avLst/>
-          </a:prstGeom>
-        </p:spPr>
-      </p:pic>
-      <p:sp>
-        <p:nvSpPr>
-          <p:cNvPr id="4" name="TextBox 3"/>
+              <a:t>Appendix</a:t>
+            </a:r>
+          </a:p>
+        </p:txBody>
+      </p:sp>
+      <p:sp>
+        <p:nvSpPr>
+          <p:cNvPr id="3" name="TextBox 2"/>
           <p:cNvSpPr txBox="1"/>
           <p:nvPr/>
         </p:nvSpPr>
         <p:spPr>
           <a:xfrm>
-            <a:off x="1500000" y="4100000"/>
-            <a:ext cx="9100000" cy="1200000"/>
+            <a:off x="1000000" y="2000000"/>
+            <a:ext cx="5000000" cy="400000"/>
           </a:xfrm>
           <a:prstGeom prst="rect">
             <a:avLst/>
@@ -4490,29 +4256,29 @@
           </a:bodyPr>
           <a:lstStyle/>
           <a:p>
-            <a:pPr algn="ctr"/>
-            <a:r>
-              <a:rPr sz="2200" b="0">
-                <a:solidFill>
-                  <a:srgbClr val="1A1714"/>
+            <a:pPr algn="l"/>
+            <a:r>
+              <a:rPr sz="1800" b="1">
+                <a:solidFill>
+                  <a:srgbClr val="8B6B22"/>
                 </a:solidFill>
                 <a:latin typeface="DM Sans"/>
               </a:rPr>
-              <a:t>Telegram message at 9:00 AM weekdays. Per-directorate breakdown. One screen.</a:t>
-            </a:r>
-          </a:p>
-        </p:txBody>
-      </p:sp>
-      <p:sp>
-        <p:nvSpPr>
-          <p:cNvPr id="5" name="TextBox 4"/>
+              <a:t>Live URLs</a:t>
+            </a:r>
+          </a:p>
+        </p:txBody>
+      </p:sp>
+      <p:sp>
+        <p:nvSpPr>
+          <p:cNvPr id="4" name="TextBox 3"/>
           <p:cNvSpPr txBox="1"/>
           <p:nvPr/>
         </p:nvSpPr>
         <p:spPr>
           <a:xfrm>
-            <a:off x="8000000" y="6500000"/>
-            <a:ext cx="4000000" cy="300000"/>
+            <a:off x="1000000" y="2500000"/>
+            <a:ext cx="5000000" cy="400000"/>
           </a:xfrm>
           <a:prstGeom prst="rect">
             <a:avLst/>
@@ -4525,55 +4291,29 @@
           </a:bodyPr>
           <a:lstStyle/>
           <a:p>
-            <a:pPr algn="r"/>
-            <a:r>
-              <a:rPr sz="1100" b="0">
-                <a:solidFill>
-                  <a:srgbClr val="D8CFBE"/>
+            <a:pPr algn="l"/>
+            <a:r>
+              <a:rPr sz="1400" b="0">
+                <a:solidFill>
+                  <a:srgbClr val="1A1714"/>
                 </a:solidFill>
                 <a:latin typeface="DM Sans"/>
               </a:rPr>
-              <a:t>03 · Staff Attendance · 15/20</a:t>
-            </a:r>
-          </a:p>
-        </p:txBody>
-      </p:sp>
-    </p:spTree>
-  </p:cSld>
-  <p:clrMapOvr>
-    <a:masterClrMapping/>
-  </p:clrMapOvr>
-</p:sld>
-</file>
-
-<file path=ppt/slides/slide16.xml><?xml version="1.0" encoding="utf-8"?>
-<p:sld xmlns:a="http://schemas.openxmlformats.org/drawingml/2006/main" xmlns:p="http://schemas.openxmlformats.org/presentationml/2006/main" xmlns:r="http://schemas.openxmlformats.org/officeDocument/2006/relationships">
-  <p:cSld>
-    <p:bg>
-      <p:bgPr>
-        <a:solidFill>
-          <a:srgbClr val="F6F1E7"/>
-        </a:solidFill>
-        <a:effectLst/>
-      </p:bgPr>
-    </p:bg>
-    <p:spTree>
-      <p:nvGrpSpPr>
-        <p:cNvPr id="1" name=""/>
-        <p:cNvGrpSpPr/>
-        <p:nvPr/>
-      </p:nvGrpSpPr>
-      <p:grpSpPr/>
-      <p:sp>
-        <p:nvSpPr>
-          <p:cNvPr id="2" name="TextBox 1"/>
+              <a:t>staff-attendance.pages.dev</a:t>
+            </a:r>
+          </a:p>
+        </p:txBody>
+      </p:sp>
+      <p:sp>
+        <p:nvSpPr>
+          <p:cNvPr id="5" name="TextBox 4"/>
           <p:cNvSpPr txBox="1"/>
           <p:nvPr/>
         </p:nvSpPr>
         <p:spPr>
           <a:xfrm>
-            <a:off x="800000" y="500000"/>
-            <a:ext cx="10500000" cy="700000"/>
+            <a:off x="7000000" y="2000000"/>
+            <a:ext cx="5000000" cy="400000"/>
           </a:xfrm>
           <a:prstGeom prst="rect">
             <a:avLst/>
@@ -4588,81 +4328,27 @@
           <a:p>
             <a:pPr algn="l"/>
             <a:r>
-              <a:rPr sz="3200" b="1">
-                <a:solidFill>
-                  <a:srgbClr val="0E1411"/>
+              <a:rPr sz="1800" b="1">
+                <a:solidFill>
+                  <a:srgbClr val="8B6B22"/>
                 </a:solidFill>
                 <a:latin typeface="DM Sans"/>
               </a:rPr>
-              <a:t>9:00 AM daily summary</a:t>
-            </a:r>
-          </a:p>
-        </p:txBody>
-      </p:sp>
-      <p:sp>
-        <p:nvSpPr>
-          <p:cNvPr id="3" name="Rectangle 2"/>
-          <p:cNvSpPr/>
-          <p:nvPr/>
-        </p:nvSpPr>
-        <p:spPr>
-          <a:xfrm>
-            <a:off x="800000" y="1500000"/>
-            <a:ext cx="5800000" cy="4500000"/>
-          </a:xfrm>
-          <a:prstGeom prst="rect">
-            <a:avLst/>
-          </a:prstGeom>
-          <a:solidFill>
-            <a:srgbClr val="FBF7EF"/>
-          </a:solidFill>
-          <a:ln>
-            <a:solidFill>
-              <a:srgbClr val="D8CFBE"/>
-            </a:solidFill>
-          </a:ln>
-        </p:spPr>
-        <p:style>
-          <a:lnRef idx="1">
-            <a:schemeClr val="accent1"/>
-          </a:lnRef>
-          <a:fillRef idx="3">
-            <a:schemeClr val="accent1"/>
-          </a:fillRef>
-          <a:effectRef idx="2">
-            <a:schemeClr val="accent1"/>
-          </a:effectRef>
-          <a:fontRef idx="minor">
-            <a:schemeClr val="lt1"/>
-          </a:fontRef>
-        </p:style>
-        <p:txBody>
-          <a:bodyPr rtlCol="0" anchor="ctr"/>
-          <a:lstStyle/>
-          <a:p>
-            <a:pPr algn="ctr"/>
-            <a:r>
-              <a:rPr sz="1100">
-                <a:solidFill>
-                  <a:srgbClr val="8B6B22"/>
-                </a:solidFill>
-                <a:latin typeface="DM Sans"/>
-              </a:rPr>
-              <a:t>[REPLACE: S14-daily-summary.png]</a:t>
-            </a:r>
-          </a:p>
-        </p:txBody>
-      </p:sp>
-      <p:sp>
-        <p:nvSpPr>
-          <p:cNvPr id="4" name="TextBox 3"/>
+              <a:t>Related decks</a:t>
+            </a:r>
+          </a:p>
+        </p:txBody>
+      </p:sp>
+      <p:sp>
+        <p:nvSpPr>
+          <p:cNvPr id="6" name="TextBox 5"/>
           <p:cNvSpPr txBox="1"/>
           <p:nvPr/>
         </p:nvSpPr>
         <p:spPr>
           <a:xfrm>
-            <a:off x="7100000" y="1500000"/>
-            <a:ext cx="4200000" cy="1100000"/>
+            <a:off x="7000000" y="2500000"/>
+            <a:ext cx="5000000" cy="400000"/>
           </a:xfrm>
           <a:prstGeom prst="rect">
             <a:avLst/>
@@ -4677,27 +4363,27 @@
           <a:p>
             <a:pPr algn="l"/>
             <a:r>
-              <a:rPr sz="1600" b="0">
+              <a:rPr sz="1400" b="0">
                 <a:solidFill>
                   <a:srgbClr val="1A1714"/>
                 </a:solidFill>
                 <a:latin typeface="DM Sans"/>
               </a:rPr>
-              <a:t>①  Sent every weekday at 9:00 sharp.</a:t>
-            </a:r>
-          </a:p>
-        </p:txBody>
-      </p:sp>
-      <p:sp>
-        <p:nvSpPr>
-          <p:cNvPr id="5" name="TextBox 4"/>
+              <a:t>Deck 07 · GPS Geofence Precision</a:t>
+            </a:r>
+          </a:p>
+        </p:txBody>
+      </p:sp>
+      <p:sp>
+        <p:nvSpPr>
+          <p:cNvPr id="7" name="TextBox 6"/>
           <p:cNvSpPr txBox="1"/>
           <p:nvPr/>
         </p:nvSpPr>
         <p:spPr>
           <a:xfrm>
-            <a:off x="7100000" y="2800000"/>
-            <a:ext cx="4200000" cy="1100000"/>
+            <a:off x="7000000" y="2900000"/>
+            <a:ext cx="5000000" cy="400000"/>
           </a:xfrm>
           <a:prstGeom prst="rect">
             <a:avLst/>
@@ -4712,27 +4398,27 @@
           <a:p>
             <a:pPr algn="l"/>
             <a:r>
-              <a:rPr sz="1600" b="0">
+              <a:rPr sz="1400" b="0">
                 <a:solidFill>
                   <a:srgbClr val="1A1714"/>
                 </a:solidFill>
                 <a:latin typeface="DM Sans"/>
               </a:rPr>
-              <a:t>②  Per-directorate counts of clocked/not-clocked.</a:t>
-            </a:r>
-          </a:p>
-        </p:txBody>
-      </p:sp>
-      <p:sp>
-        <p:nvSpPr>
-          <p:cNvPr id="6" name="TextBox 5"/>
+              <a:t>Deck 10 · The Staff Experience</a:t>
+            </a:r>
+          </a:p>
+        </p:txBody>
+      </p:sp>
+      <p:sp>
+        <p:nvSpPr>
+          <p:cNvPr id="8" name="TextBox 7"/>
           <p:cNvSpPr txBox="1"/>
           <p:nvPr/>
         </p:nvSpPr>
         <p:spPr>
           <a:xfrm>
-            <a:off x="7100000" y="4100000"/>
-            <a:ext cx="4200000" cy="1100000"/>
+            <a:off x="7000000" y="3300000"/>
+            <a:ext cx="5000000" cy="400000"/>
           </a:xfrm>
           <a:prstGeom prst="rect">
             <a:avLst/>
@@ -4747,27 +4433,27 @@
           <a:p>
             <a:pPr algn="l"/>
             <a:r>
-              <a:rPr sz="1600" b="0">
+              <a:rPr sz="1400" b="0">
                 <a:solidFill>
                   <a:srgbClr val="1A1714"/>
                 </a:solidFill>
                 <a:latin typeface="DM Sans"/>
               </a:rPr>
-              <a:t>③  Outlier names surfaced — no scrolling.</a:t>
-            </a:r>
-          </a:p>
-        </p:txBody>
-      </p:sp>
-      <p:sp>
-        <p:nvSpPr>
-          <p:cNvPr id="7" name="TextBox 6"/>
+              <a:t>Deck 11 · Director Visibility</a:t>
+            </a:r>
+          </a:p>
+        </p:txBody>
+      </p:sp>
+      <p:sp>
+        <p:nvSpPr>
+          <p:cNvPr id="9" name="TextBox 8"/>
           <p:cNvSpPr txBox="1"/>
           <p:nvPr/>
         </p:nvSpPr>
         <p:spPr>
           <a:xfrm>
-            <a:off x="800000" y="6100000"/>
-            <a:ext cx="10500000" cy="300000"/>
+            <a:off x="1000000" y="6300000"/>
+            <a:ext cx="10000000" cy="400000"/>
           </a:xfrm>
           <a:prstGeom prst="rect">
             <a:avLst/>
@@ -4780,7 +4466,7 @@
           </a:bodyPr>
           <a:lstStyle/>
           <a:p>
-            <a:pPr algn="l"/>
+            <a:pPr algn="ctr"/>
             <a:r>
               <a:rPr sz="1100" b="0">
                 <a:solidFill>
@@ -4788,14 +4474,14 @@
                 </a:solidFill>
                 <a:latin typeface="DM Sans"/>
               </a:rPr>
-              <a:t>Daily summary, captured today.</a:t>
-            </a:r>
-          </a:p>
-        </p:txBody>
-      </p:sp>
-      <p:sp>
-        <p:nvSpPr>
-          <p:cNvPr id="8" name="TextBox 7"/>
+              <a:t>Built on Cloudflare's edge · Designed in the Kente Executive language</a:t>
+            </a:r>
+          </a:p>
+        </p:txBody>
+      </p:sp>
+      <p:sp>
+        <p:nvSpPr>
+          <p:cNvPr id="10" name="TextBox 9"/>
           <p:cNvSpPr txBox="1"/>
           <p:nvPr/>
         </p:nvSpPr>
@@ -4823,402 +4509,7 @@
                 </a:solidFill>
                 <a:latin typeface="DM Sans"/>
               </a:rPr>
-              <a:t>03 · Staff Attendance · 16/20</a:t>
-            </a:r>
-          </a:p>
-        </p:txBody>
-      </p:sp>
-    </p:spTree>
-  </p:cSld>
-  <p:clrMapOvr>
-    <a:masterClrMapping/>
-  </p:clrMapOvr>
-</p:sld>
-</file>
-
-<file path=ppt/slides/slide17.xml><?xml version="1.0" encoding="utf-8"?>
-<p:sld xmlns:a="http://schemas.openxmlformats.org/drawingml/2006/main" xmlns:p="http://schemas.openxmlformats.org/presentationml/2006/main" xmlns:r="http://schemas.openxmlformats.org/officeDocument/2006/relationships">
-  <p:cSld>
-    <p:bg>
-      <p:bgPr>
-        <a:solidFill>
-          <a:srgbClr val="F6F1E7"/>
-        </a:solidFill>
-        <a:effectLst/>
-      </p:bgPr>
-    </p:bg>
-    <p:spTree>
-      <p:nvGrpSpPr>
-        <p:cNvPr id="1" name=""/>
-        <p:cNvGrpSpPr/>
-        <p:nvPr/>
-      </p:nvGrpSpPr>
-      <p:grpSpPr/>
-      <p:sp>
-        <p:nvSpPr>
-          <p:cNvPr id="2" name="TextBox 1"/>
-          <p:cNvSpPr txBox="1"/>
-          <p:nvPr/>
-        </p:nvSpPr>
-        <p:spPr>
-          <a:xfrm>
-            <a:off x="1200000" y="2200000"/>
-            <a:ext cx="9700000" cy="1500000"/>
-          </a:xfrm>
-          <a:prstGeom prst="rect">
-            <a:avLst/>
-          </a:prstGeom>
-          <a:noFill/>
-        </p:spPr>
-        <p:txBody>
-          <a:bodyPr wrap="square">
-            <a:spAutoFit/>
-          </a:bodyPr>
-          <a:lstStyle/>
-          <a:p>
-            <a:pPr algn="ctr"/>
-            <a:r>
-              <a:rPr sz="4400" b="1">
-                <a:solidFill>
-                  <a:srgbClr val="0E1411"/>
-                </a:solidFill>
-                <a:latin typeface="Playfair Display"/>
-              </a:rPr>
-              <a:t>One staff voice on what's changed.</a:t>
-            </a:r>
-          </a:p>
-        </p:txBody>
-      </p:sp>
-      <p:pic>
-        <p:nvPicPr>
-          <p:cNvPr id="3" name="Picture 2" descr="gold-deco-hairline.png"/>
-          <p:cNvPicPr>
-            <a:picLocks noChangeAspect="1"/>
-          </p:cNvPicPr>
-          <p:nvPr/>
-        </p:nvPicPr>
-        <p:blipFill>
-          <a:blip r:embed="rId2"/>
-          <a:stretch>
-            <a:fillRect/>
-          </a:stretch>
-        </p:blipFill>
-        <p:spPr>
-          <a:xfrm>
-            <a:off x="5896000" y="3800000"/>
-            <a:ext cx="400000" cy="20000"/>
-          </a:xfrm>
-          <a:prstGeom prst="rect">
-            <a:avLst/>
-          </a:prstGeom>
-        </p:spPr>
-      </p:pic>
-      <p:sp>
-        <p:nvSpPr>
-          <p:cNvPr id="4" name="TextBox 3"/>
-          <p:cNvSpPr txBox="1"/>
-          <p:nvPr/>
-        </p:nvSpPr>
-        <p:spPr>
-          <a:xfrm>
-            <a:off x="1500000" y="4100000"/>
-            <a:ext cx="9100000" cy="1200000"/>
-          </a:xfrm>
-          <a:prstGeom prst="rect">
-            <a:avLst/>
-          </a:prstGeom>
-          <a:noFill/>
-        </p:spPr>
-        <p:txBody>
-          <a:bodyPr wrap="square">
-            <a:spAutoFit/>
-          </a:bodyPr>
-          <a:lstStyle/>
-          <a:p>
-            <a:pPr algn="ctr"/>
-            <a:r>
-              <a:rPr sz="2200" b="0">
-                <a:solidFill>
-                  <a:srgbClr val="1A1714"/>
-                </a:solidFill>
-                <a:latin typeface="DM Sans"/>
-              </a:rPr>
-              <a:t>"&lt;Q05&gt;"</a:t>
-            </a:r>
-          </a:p>
-        </p:txBody>
-      </p:sp>
-      <p:sp>
-        <p:nvSpPr>
-          <p:cNvPr id="5" name="TextBox 4"/>
-          <p:cNvSpPr txBox="1"/>
-          <p:nvPr/>
-        </p:nvSpPr>
-        <p:spPr>
-          <a:xfrm>
-            <a:off x="8000000" y="6500000"/>
-            <a:ext cx="4000000" cy="300000"/>
-          </a:xfrm>
-          <a:prstGeom prst="rect">
-            <a:avLst/>
-          </a:prstGeom>
-          <a:noFill/>
-        </p:spPr>
-        <p:txBody>
-          <a:bodyPr wrap="square">
-            <a:spAutoFit/>
-          </a:bodyPr>
-          <a:lstStyle/>
-          <a:p>
-            <a:pPr algn="r"/>
-            <a:r>
-              <a:rPr sz="1100" b="0">
-                <a:solidFill>
-                  <a:srgbClr val="D8CFBE"/>
-                </a:solidFill>
-                <a:latin typeface="DM Sans"/>
-              </a:rPr>
-              <a:t>03 · Staff Attendance · 17/20</a:t>
-            </a:r>
-          </a:p>
-        </p:txBody>
-      </p:sp>
-    </p:spTree>
-  </p:cSld>
-  <p:clrMapOvr>
-    <a:masterClrMapping/>
-  </p:clrMapOvr>
-</p:sld>
-</file>
-
-<file path=ppt/slides/slide18.xml><?xml version="1.0" encoding="utf-8"?>
-<p:sld xmlns:a="http://schemas.openxmlformats.org/drawingml/2006/main" xmlns:p="http://schemas.openxmlformats.org/presentationml/2006/main" xmlns:r="http://schemas.openxmlformats.org/officeDocument/2006/relationships">
-  <p:cSld>
-    <p:bg>
-      <p:bgPr>
-        <a:solidFill>
-          <a:srgbClr val="F6F1E7"/>
-        </a:solidFill>
-        <a:effectLst/>
-      </p:bgPr>
-    </p:bg>
-    <p:spTree>
-      <p:nvGrpSpPr>
-        <p:cNvPr id="1" name=""/>
-        <p:cNvGrpSpPr/>
-        <p:nvPr/>
-      </p:nvGrpSpPr>
-      <p:grpSpPr/>
-      <p:sp>
-        <p:nvSpPr>
-          <p:cNvPr id="2" name="TextBox 1"/>
-          <p:cNvSpPr txBox="1"/>
-          <p:nvPr/>
-        </p:nvSpPr>
-        <p:spPr>
-          <a:xfrm>
-            <a:off x="1200000" y="2200000"/>
-            <a:ext cx="9700000" cy="1500000"/>
-          </a:xfrm>
-          <a:prstGeom prst="rect">
-            <a:avLst/>
-          </a:prstGeom>
-          <a:noFill/>
-        </p:spPr>
-        <p:txBody>
-          <a:bodyPr wrap="square">
-            <a:spAutoFit/>
-          </a:bodyPr>
-          <a:lstStyle/>
-          <a:p>
-            <a:pPr algn="ctr"/>
-            <a:r>
-              <a:rPr sz="4400" b="1">
-                <a:solidFill>
-                  <a:srgbClr val="0E1411"/>
-                </a:solidFill>
-                <a:latin typeface="Playfair Display"/>
-              </a:rPr>
-              <a:t>The eBadge — staff identity, in the pocket.</a:t>
-            </a:r>
-          </a:p>
-        </p:txBody>
-      </p:sp>
-      <p:pic>
-        <p:nvPicPr>
-          <p:cNvPr id="3" name="Picture 2" descr="gold-deco-hairline.png"/>
-          <p:cNvPicPr>
-            <a:picLocks noChangeAspect="1"/>
-          </p:cNvPicPr>
-          <p:nvPr/>
-        </p:nvPicPr>
-        <p:blipFill>
-          <a:blip r:embed="rId2"/>
-          <a:stretch>
-            <a:fillRect/>
-          </a:stretch>
-        </p:blipFill>
-        <p:spPr>
-          <a:xfrm>
-            <a:off x="5896000" y="3800000"/>
-            <a:ext cx="400000" cy="20000"/>
-          </a:xfrm>
-          <a:prstGeom prst="rect">
-            <a:avLst/>
-          </a:prstGeom>
-        </p:spPr>
-      </p:pic>
-      <p:sp>
-        <p:nvSpPr>
-          <p:cNvPr id="4" name="TextBox 3"/>
-          <p:cNvSpPr txBox="1"/>
-          <p:nvPr/>
-        </p:nvSpPr>
-        <p:spPr>
-          <a:xfrm>
-            <a:off x="1500000" y="4100000"/>
-            <a:ext cx="9100000" cy="1200000"/>
-          </a:xfrm>
-          <a:prstGeom prst="rect">
-            <a:avLst/>
-          </a:prstGeom>
-          <a:noFill/>
-        </p:spPr>
-        <p:txBody>
-          <a:bodyPr wrap="square">
-            <a:spAutoFit/>
-          </a:bodyPr>
-          <a:lstStyle/>
-          <a:p>
-            <a:pPr algn="ctr"/>
-            <a:r>
-              <a:rPr sz="2200" b="0">
-                <a:solidFill>
-                  <a:srgbClr val="1A1714"/>
-                </a:solidFill>
-                <a:latin typeface="DM Sans"/>
-              </a:rPr>
-              <a:t>Digital, scannable, refreshable. The paper card retires.</a:t>
-            </a:r>
-          </a:p>
-        </p:txBody>
-      </p:sp>
-      <p:sp>
-        <p:nvSpPr>
-          <p:cNvPr id="5" name="TextBox 4"/>
-          <p:cNvSpPr txBox="1"/>
-          <p:nvPr/>
-        </p:nvSpPr>
-        <p:spPr>
-          <a:xfrm>
-            <a:off x="8000000" y="6500000"/>
-            <a:ext cx="4000000" cy="300000"/>
-          </a:xfrm>
-          <a:prstGeom prst="rect">
-            <a:avLst/>
-          </a:prstGeom>
-          <a:noFill/>
-        </p:spPr>
-        <p:txBody>
-          <a:bodyPr wrap="square">
-            <a:spAutoFit/>
-          </a:bodyPr>
-          <a:lstStyle/>
-          <a:p>
-            <a:pPr algn="r"/>
-            <a:r>
-              <a:rPr sz="1100" b="0">
-                <a:solidFill>
-                  <a:srgbClr val="D8CFBE"/>
-                </a:solidFill>
-                <a:latin typeface="DM Sans"/>
-              </a:rPr>
-              <a:t>03 · Staff Attendance · 18/20</a:t>
-            </a:r>
-          </a:p>
-        </p:txBody>
-      </p:sp>
-    </p:spTree>
-  </p:cSld>
-  <p:clrMapOvr>
-    <a:masterClrMapping/>
-  </p:clrMapOvr>
-</p:sld>
-</file>
-
-<file path=ppt/slides/slide19.xml><?xml version="1.0" encoding="utf-8"?>
-<p:sld xmlns:a="http://schemas.openxmlformats.org/drawingml/2006/main" xmlns:p="http://schemas.openxmlformats.org/presentationml/2006/main" xmlns:r="http://schemas.openxmlformats.org/officeDocument/2006/relationships">
-  <p:cSld>
-    <p:bg>
-      <p:bgPr>
-        <a:solidFill>
-          <a:srgbClr val="0E1411"/>
-        </a:solidFill>
-        <a:effectLst/>
-      </p:bgPr>
-    </p:bg>
-    <p:spTree>
-      <p:nvGrpSpPr>
-        <p:cNvPr id="1" name=""/>
-        <p:cNvGrpSpPr/>
-        <p:nvPr/>
-      </p:nvGrpSpPr>
-      <p:grpSpPr/>
-      <p:pic>
-        <p:nvPicPr>
-          <p:cNvPr id="2" name="Picture 1" descr="kente-texture-overlay.png"/>
-          <p:cNvPicPr>
-            <a:picLocks noChangeAspect="1"/>
-          </p:cNvPicPr>
-          <p:nvPr/>
-        </p:nvPicPr>
-        <p:blipFill>
-          <a:blip r:embed="rId2"/>
-          <a:stretch>
-            <a:fillRect/>
-          </a:stretch>
-        </p:blipFill>
-        <p:spPr>
-          <a:xfrm>
-            <a:off x="0" y="0"/>
-            <a:ext cx="12192000" cy="6858000"/>
-          </a:xfrm>
-          <a:prstGeom prst="rect">
-            <a:avLst/>
-          </a:prstGeom>
-        </p:spPr>
-      </p:pic>
-      <p:sp>
-        <p:nvSpPr>
-          <p:cNvPr id="3" name="TextBox 2"/>
-          <p:cNvSpPr txBox="1"/>
-          <p:nvPr/>
-        </p:nvSpPr>
-        <p:spPr>
-          <a:xfrm>
-            <a:off x="1600000" y="2800000"/>
-            <a:ext cx="8900000" cy="2000000"/>
-          </a:xfrm>
-          <a:prstGeom prst="rect">
-            <a:avLst/>
-          </a:prstGeom>
-          <a:noFill/>
-        </p:spPr>
-        <p:txBody>
-          <a:bodyPr wrap="square">
-            <a:spAutoFit/>
-          </a:bodyPr>
-          <a:lstStyle/>
-          <a:p>
-            <a:pPr algn="ctr"/>
-            <a:r>
-              <a:rPr sz="4400" b="0">
-                <a:solidFill>
-                  <a:srgbClr val="F6F1E7"/>
-                </a:solidFill>
-                <a:latin typeface="Playfair Display"/>
-              </a:rPr>
-              <a:t>Attendance is dignity. SmartGate treats it that way.</a:t>
+              <a:t>03 · Staff Attendance · 15/15</a:t>
             </a:r>
           </a:p>
         </p:txBody>
@@ -5316,347 +4607,6 @@
 </p:sld>
 </file>
 
-<file path=ppt/slides/slide20.xml><?xml version="1.0" encoding="utf-8"?>
-<p:sld xmlns:a="http://schemas.openxmlformats.org/drawingml/2006/main" xmlns:p="http://schemas.openxmlformats.org/presentationml/2006/main" xmlns:r="http://schemas.openxmlformats.org/officeDocument/2006/relationships">
-  <p:cSld>
-    <p:bg>
-      <p:bgPr>
-        <a:solidFill>
-          <a:srgbClr val="F6F1E7"/>
-        </a:solidFill>
-        <a:effectLst/>
-      </p:bgPr>
-    </p:bg>
-    <p:spTree>
-      <p:nvGrpSpPr>
-        <p:cNvPr id="1" name=""/>
-        <p:cNvGrpSpPr/>
-        <p:nvPr/>
-      </p:nvGrpSpPr>
-      <p:grpSpPr/>
-      <p:sp>
-        <p:nvSpPr>
-          <p:cNvPr id="2" name="TextBox 1"/>
-          <p:cNvSpPr txBox="1"/>
-          <p:nvPr/>
-        </p:nvSpPr>
-        <p:spPr>
-          <a:xfrm>
-            <a:off x="1000000" y="800000"/>
-            <a:ext cx="10000000" cy="700000"/>
-          </a:xfrm>
-          <a:prstGeom prst="rect">
-            <a:avLst/>
-          </a:prstGeom>
-          <a:noFill/>
-        </p:spPr>
-        <p:txBody>
-          <a:bodyPr wrap="square">
-            <a:spAutoFit/>
-          </a:bodyPr>
-          <a:lstStyle/>
-          <a:p>
-            <a:pPr algn="l"/>
-            <a:r>
-              <a:rPr sz="4400" b="1">
-                <a:solidFill>
-                  <a:srgbClr val="0E1411"/>
-                </a:solidFill>
-                <a:latin typeface="Playfair Display"/>
-              </a:rPr>
-              <a:t>Appendix</a:t>
-            </a:r>
-          </a:p>
-        </p:txBody>
-      </p:sp>
-      <p:sp>
-        <p:nvSpPr>
-          <p:cNvPr id="3" name="TextBox 2"/>
-          <p:cNvSpPr txBox="1"/>
-          <p:nvPr/>
-        </p:nvSpPr>
-        <p:spPr>
-          <a:xfrm>
-            <a:off x="1000000" y="2000000"/>
-            <a:ext cx="5000000" cy="400000"/>
-          </a:xfrm>
-          <a:prstGeom prst="rect">
-            <a:avLst/>
-          </a:prstGeom>
-          <a:noFill/>
-        </p:spPr>
-        <p:txBody>
-          <a:bodyPr wrap="square">
-            <a:spAutoFit/>
-          </a:bodyPr>
-          <a:lstStyle/>
-          <a:p>
-            <a:pPr algn="l"/>
-            <a:r>
-              <a:rPr sz="1800" b="1">
-                <a:solidFill>
-                  <a:srgbClr val="8B6B22"/>
-                </a:solidFill>
-                <a:latin typeface="DM Sans"/>
-              </a:rPr>
-              <a:t>Live URLs</a:t>
-            </a:r>
-          </a:p>
-        </p:txBody>
-      </p:sp>
-      <p:sp>
-        <p:nvSpPr>
-          <p:cNvPr id="4" name="TextBox 3"/>
-          <p:cNvSpPr txBox="1"/>
-          <p:nvPr/>
-        </p:nvSpPr>
-        <p:spPr>
-          <a:xfrm>
-            <a:off x="1000000" y="2500000"/>
-            <a:ext cx="5000000" cy="400000"/>
-          </a:xfrm>
-          <a:prstGeom prst="rect">
-            <a:avLst/>
-          </a:prstGeom>
-          <a:noFill/>
-        </p:spPr>
-        <p:txBody>
-          <a:bodyPr wrap="square">
-            <a:spAutoFit/>
-          </a:bodyPr>
-          <a:lstStyle/>
-          <a:p>
-            <a:pPr algn="l"/>
-            <a:r>
-              <a:rPr sz="1400" b="0">
-                <a:solidFill>
-                  <a:srgbClr val="1A1714"/>
-                </a:solidFill>
-                <a:latin typeface="DM Sans"/>
-              </a:rPr>
-              <a:t>staff-attendance.pages.dev</a:t>
-            </a:r>
-          </a:p>
-        </p:txBody>
-      </p:sp>
-      <p:sp>
-        <p:nvSpPr>
-          <p:cNvPr id="5" name="TextBox 4"/>
-          <p:cNvSpPr txBox="1"/>
-          <p:nvPr/>
-        </p:nvSpPr>
-        <p:spPr>
-          <a:xfrm>
-            <a:off x="7000000" y="2000000"/>
-            <a:ext cx="5000000" cy="400000"/>
-          </a:xfrm>
-          <a:prstGeom prst="rect">
-            <a:avLst/>
-          </a:prstGeom>
-          <a:noFill/>
-        </p:spPr>
-        <p:txBody>
-          <a:bodyPr wrap="square">
-            <a:spAutoFit/>
-          </a:bodyPr>
-          <a:lstStyle/>
-          <a:p>
-            <a:pPr algn="l"/>
-            <a:r>
-              <a:rPr sz="1800" b="1">
-                <a:solidFill>
-                  <a:srgbClr val="8B6B22"/>
-                </a:solidFill>
-                <a:latin typeface="DM Sans"/>
-              </a:rPr>
-              <a:t>Related decks</a:t>
-            </a:r>
-          </a:p>
-        </p:txBody>
-      </p:sp>
-      <p:sp>
-        <p:nvSpPr>
-          <p:cNvPr id="6" name="TextBox 5"/>
-          <p:cNvSpPr txBox="1"/>
-          <p:nvPr/>
-        </p:nvSpPr>
-        <p:spPr>
-          <a:xfrm>
-            <a:off x="7000000" y="2500000"/>
-            <a:ext cx="5000000" cy="400000"/>
-          </a:xfrm>
-          <a:prstGeom prst="rect">
-            <a:avLst/>
-          </a:prstGeom>
-          <a:noFill/>
-        </p:spPr>
-        <p:txBody>
-          <a:bodyPr wrap="square">
-            <a:spAutoFit/>
-          </a:bodyPr>
-          <a:lstStyle/>
-          <a:p>
-            <a:pPr algn="l"/>
-            <a:r>
-              <a:rPr sz="1400" b="0">
-                <a:solidFill>
-                  <a:srgbClr val="1A1714"/>
-                </a:solidFill>
-                <a:latin typeface="DM Sans"/>
-              </a:rPr>
-              <a:t>Deck 07 · GPS Geofence Precision</a:t>
-            </a:r>
-          </a:p>
-        </p:txBody>
-      </p:sp>
-      <p:sp>
-        <p:nvSpPr>
-          <p:cNvPr id="7" name="TextBox 6"/>
-          <p:cNvSpPr txBox="1"/>
-          <p:nvPr/>
-        </p:nvSpPr>
-        <p:spPr>
-          <a:xfrm>
-            <a:off x="7000000" y="2900000"/>
-            <a:ext cx="5000000" cy="400000"/>
-          </a:xfrm>
-          <a:prstGeom prst="rect">
-            <a:avLst/>
-          </a:prstGeom>
-          <a:noFill/>
-        </p:spPr>
-        <p:txBody>
-          <a:bodyPr wrap="square">
-            <a:spAutoFit/>
-          </a:bodyPr>
-          <a:lstStyle/>
-          <a:p>
-            <a:pPr algn="l"/>
-            <a:r>
-              <a:rPr sz="1400" b="0">
-                <a:solidFill>
-                  <a:srgbClr val="1A1714"/>
-                </a:solidFill>
-                <a:latin typeface="DM Sans"/>
-              </a:rPr>
-              <a:t>Deck 10 · The Staff Experience</a:t>
-            </a:r>
-          </a:p>
-        </p:txBody>
-      </p:sp>
-      <p:sp>
-        <p:nvSpPr>
-          <p:cNvPr id="8" name="TextBox 7"/>
-          <p:cNvSpPr txBox="1"/>
-          <p:nvPr/>
-        </p:nvSpPr>
-        <p:spPr>
-          <a:xfrm>
-            <a:off x="7000000" y="3300000"/>
-            <a:ext cx="5000000" cy="400000"/>
-          </a:xfrm>
-          <a:prstGeom prst="rect">
-            <a:avLst/>
-          </a:prstGeom>
-          <a:noFill/>
-        </p:spPr>
-        <p:txBody>
-          <a:bodyPr wrap="square">
-            <a:spAutoFit/>
-          </a:bodyPr>
-          <a:lstStyle/>
-          <a:p>
-            <a:pPr algn="l"/>
-            <a:r>
-              <a:rPr sz="1400" b="0">
-                <a:solidFill>
-                  <a:srgbClr val="1A1714"/>
-                </a:solidFill>
-                <a:latin typeface="DM Sans"/>
-              </a:rPr>
-              <a:t>Deck 11 · Director Visibility</a:t>
-            </a:r>
-          </a:p>
-        </p:txBody>
-      </p:sp>
-      <p:sp>
-        <p:nvSpPr>
-          <p:cNvPr id="9" name="TextBox 8"/>
-          <p:cNvSpPr txBox="1"/>
-          <p:nvPr/>
-        </p:nvSpPr>
-        <p:spPr>
-          <a:xfrm>
-            <a:off x="1000000" y="6300000"/>
-            <a:ext cx="10000000" cy="400000"/>
-          </a:xfrm>
-          <a:prstGeom prst="rect">
-            <a:avLst/>
-          </a:prstGeom>
-          <a:noFill/>
-        </p:spPr>
-        <p:txBody>
-          <a:bodyPr wrap="square">
-            <a:spAutoFit/>
-          </a:bodyPr>
-          <a:lstStyle/>
-          <a:p>
-            <a:pPr algn="ctr"/>
-            <a:r>
-              <a:rPr sz="1100" b="0">
-                <a:solidFill>
-                  <a:srgbClr val="8B6B22"/>
-                </a:solidFill>
-                <a:latin typeface="DM Sans"/>
-              </a:rPr>
-              <a:t>Built on Cloudflare's edge · Designed in the Kente Executive language</a:t>
-            </a:r>
-          </a:p>
-        </p:txBody>
-      </p:sp>
-      <p:sp>
-        <p:nvSpPr>
-          <p:cNvPr id="10" name="TextBox 9"/>
-          <p:cNvSpPr txBox="1"/>
-          <p:nvPr/>
-        </p:nvSpPr>
-        <p:spPr>
-          <a:xfrm>
-            <a:off x="8000000" y="6500000"/>
-            <a:ext cx="4000000" cy="300000"/>
-          </a:xfrm>
-          <a:prstGeom prst="rect">
-            <a:avLst/>
-          </a:prstGeom>
-          <a:noFill/>
-        </p:spPr>
-        <p:txBody>
-          <a:bodyPr wrap="square">
-            <a:spAutoFit/>
-          </a:bodyPr>
-          <a:lstStyle/>
-          <a:p>
-            <a:pPr algn="r"/>
-            <a:r>
-              <a:rPr sz="1100" b="0">
-                <a:solidFill>
-                  <a:srgbClr val="D8CFBE"/>
-                </a:solidFill>
-                <a:latin typeface="DM Sans"/>
-              </a:rPr>
-              <a:t>03 · Staff Attendance · 20/20</a:t>
-            </a:r>
-          </a:p>
-        </p:txBody>
-      </p:sp>
-    </p:spTree>
-  </p:cSld>
-  <p:clrMapOvr>
-    <a:masterClrMapping/>
-  </p:clrMapOvr>
-</p:sld>
-</file>
-
 <file path=ppt/slides/slide3.xml><?xml version="1.0" encoding="utf-8"?>
 <p:sld xmlns:a="http://schemas.openxmlformats.org/drawingml/2006/main" xmlns:p="http://schemas.openxmlformats.org/presentationml/2006/main" xmlns:r="http://schemas.openxmlformats.org/officeDocument/2006/relationships">
   <p:cSld>
@@ -5740,7 +4690,7 @@
                 </a:solidFill>
                 <a:latin typeface="DM Sans"/>
               </a:rPr>
-              <a:t>03 · Staff Attendance · 03/20</a:t>
+              <a:t>03 · Staff Attendance · 03/15</a:t>
             </a:r>
           </a:p>
         </p:txBody>
@@ -5895,7 +4845,7 @@
                 </a:solidFill>
                 <a:latin typeface="DM Sans"/>
               </a:rPr>
-              <a:t>03 · Staff Attendance · 04/20</a:t>
+              <a:t>03 · Staff Attendance · 04/15</a:t>
             </a:r>
           </a:p>
         </p:txBody>
@@ -5934,8 +4884,8 @@
         </p:nvSpPr>
         <p:spPr>
           <a:xfrm>
-            <a:off x="800000" y="500000"/>
-            <a:ext cx="10500000" cy="700000"/>
+            <a:off x="1200000" y="2200000"/>
+            <a:ext cx="9700000" cy="1500000"/>
           </a:xfrm>
           <a:prstGeom prst="rect">
             <a:avLst/>
@@ -5948,73 +4898,43 @@
           </a:bodyPr>
           <a:lstStyle/>
           <a:p>
-            <a:pPr algn="l"/>
-            <a:r>
-              <a:rPr sz="3200" b="1">
+            <a:pPr algn="ctr"/>
+            <a:r>
+              <a:rPr sz="4400" b="1">
                 <a:solidFill>
                   <a:srgbClr val="0E1411"/>
                 </a:solidFill>
-                <a:latin typeface="DM Sans"/>
+                <a:latin typeface="Playfair Display"/>
               </a:rPr>
-              <a:t>Enforced PIN change</a:t>
-            </a:r>
-          </a:p>
-        </p:txBody>
-      </p:sp>
-      <p:sp>
-        <p:nvSpPr>
-          <p:cNvPr id="3" name="Rectangle 2"/>
-          <p:cNvSpPr/>
-          <p:nvPr/>
-        </p:nvSpPr>
-        <p:spPr>
-          <a:xfrm>
-            <a:off x="800000" y="1500000"/>
-            <a:ext cx="5800000" cy="4500000"/>
-          </a:xfrm>
-          <a:prstGeom prst="rect">
-            <a:avLst/>
-          </a:prstGeom>
-          <a:solidFill>
-            <a:srgbClr val="FBF7EF"/>
-          </a:solidFill>
-          <a:ln>
-            <a:solidFill>
-              <a:srgbClr val="D8CFBE"/>
-            </a:solidFill>
-          </a:ln>
-        </p:spPr>
-        <p:style>
-          <a:lnRef idx="1">
-            <a:schemeClr val="accent1"/>
-          </a:lnRef>
-          <a:fillRef idx="3">
-            <a:schemeClr val="accent1"/>
-          </a:fillRef>
-          <a:effectRef idx="2">
-            <a:schemeClr val="accent1"/>
-          </a:effectRef>
-          <a:fontRef idx="minor">
-            <a:schemeClr val="lt1"/>
-          </a:fontRef>
-        </p:style>
-        <p:txBody>
-          <a:bodyPr rtlCol="0" anchor="ctr"/>
-          <a:lstStyle/>
-          <a:p>
-            <a:pPr algn="ctr"/>
-            <a:r>
-              <a:rPr sz="1100">
-                <a:solidFill>
-                  <a:srgbClr val="8B6B22"/>
-                </a:solidFill>
-                <a:latin typeface="DM Sans"/>
-              </a:rPr>
-              <a:t>[REPLACE: S11-first-login-pin.png]</a:t>
-            </a:r>
-          </a:p>
-        </p:txBody>
-      </p:sp>
+              <a:t>The 75-metre circle isn't a circle.</a:t>
+            </a:r>
+          </a:p>
+        </p:txBody>
+      </p:sp>
+      <p:pic>
+        <p:nvPicPr>
+          <p:cNvPr id="3" name="Picture 2" descr="gold-deco-hairline.png"/>
+          <p:cNvPicPr>
+            <a:picLocks noChangeAspect="1"/>
+          </p:cNvPicPr>
+          <p:nvPr/>
+        </p:nvPicPr>
+        <p:blipFill>
+          <a:blip r:embed="rId2"/>
+          <a:stretch>
+            <a:fillRect/>
+          </a:stretch>
+        </p:blipFill>
+        <p:spPr>
+          <a:xfrm>
+            <a:off x="5896000" y="3800000"/>
+            <a:ext cx="400000" cy="20000"/>
+          </a:xfrm>
+          <a:prstGeom prst="rect">
+            <a:avLst/>
+          </a:prstGeom>
+        </p:spPr>
+      </p:pic>
       <p:sp>
         <p:nvSpPr>
           <p:cNvPr id="4" name="TextBox 3"/>
@@ -6023,8 +4943,8 @@
         </p:nvSpPr>
         <p:spPr>
           <a:xfrm>
-            <a:off x="7100000" y="1500000"/>
-            <a:ext cx="4200000" cy="1100000"/>
+            <a:off x="1500000" y="4100000"/>
+            <a:ext cx="9100000" cy="1200000"/>
           </a:xfrm>
           <a:prstGeom prst="rect">
             <a:avLst/>
@@ -6037,15 +4957,15 @@
           </a:bodyPr>
           <a:lstStyle/>
           <a:p>
-            <a:pPr algn="l"/>
-            <a:r>
-              <a:rPr sz="1600" b="0">
+            <a:pPr algn="ctr"/>
+            <a:r>
+              <a:rPr sz="2200" b="0">
                 <a:solidFill>
                   <a:srgbClr val="1A1714"/>
                 </a:solidFill>
                 <a:latin typeface="DM Sans"/>
               </a:rPr>
-              <a:t>①  Triggered automatically on default PIN.</a:t>
+              <a:t>It's a circle plus your phone's reported GPS accuracy.</a:t>
             </a:r>
           </a:p>
         </p:txBody>
@@ -6058,8 +4978,8 @@
         </p:nvSpPr>
         <p:spPr>
           <a:xfrm>
-            <a:off x="7100000" y="2800000"/>
-            <a:ext cx="4200000" cy="1100000"/>
+            <a:off x="8000000" y="6500000"/>
+            <a:ext cx="4000000" cy="300000"/>
           </a:xfrm>
           <a:prstGeom prst="rect">
             <a:avLst/>
@@ -6072,120 +4992,15 @@
           </a:bodyPr>
           <a:lstStyle/>
           <a:p>
-            <a:pPr algn="l"/>
-            <a:r>
-              <a:rPr sz="1600" b="0">
-                <a:solidFill>
-                  <a:srgbClr val="1A1714"/>
+            <a:pPr algn="r"/>
+            <a:r>
+              <a:rPr sz="1100" b="0">
+                <a:solidFill>
+                  <a:srgbClr val="D8CFBE"/>
                 </a:solidFill>
                 <a:latin typeface="DM Sans"/>
               </a:rPr>
-              <a:t>②  Validates length + character variety.</a:t>
-            </a:r>
-          </a:p>
-        </p:txBody>
-      </p:sp>
-      <p:sp>
-        <p:nvSpPr>
-          <p:cNvPr id="6" name="TextBox 5"/>
-          <p:cNvSpPr txBox="1"/>
-          <p:nvPr/>
-        </p:nvSpPr>
-        <p:spPr>
-          <a:xfrm>
-            <a:off x="7100000" y="4100000"/>
-            <a:ext cx="4200000" cy="1100000"/>
-          </a:xfrm>
-          <a:prstGeom prst="rect">
-            <a:avLst/>
-          </a:prstGeom>
-          <a:noFill/>
-        </p:spPr>
-        <p:txBody>
-          <a:bodyPr wrap="square">
-            <a:spAutoFit/>
-          </a:bodyPr>
-          <a:lstStyle/>
-          <a:p>
-            <a:pPr algn="l"/>
-            <a:r>
-              <a:rPr sz="1600" b="0">
-                <a:solidFill>
-                  <a:srgbClr val="1A1714"/>
-                </a:solidFill>
-                <a:latin typeface="DM Sans"/>
-              </a:rPr>
-              <a:t>③  Confirmation reduces silent re-entry.</a:t>
-            </a:r>
-          </a:p>
-        </p:txBody>
-      </p:sp>
-      <p:sp>
-        <p:nvSpPr>
-          <p:cNvPr id="7" name="TextBox 6"/>
-          <p:cNvSpPr txBox="1"/>
-          <p:nvPr/>
-        </p:nvSpPr>
-        <p:spPr>
-          <a:xfrm>
-            <a:off x="800000" y="6100000"/>
-            <a:ext cx="10500000" cy="300000"/>
-          </a:xfrm>
-          <a:prstGeom prst="rect">
-            <a:avLst/>
-          </a:prstGeom>
-          <a:noFill/>
-        </p:spPr>
-        <p:txBody>
-          <a:bodyPr wrap="square">
-            <a:spAutoFit/>
-          </a:bodyPr>
-          <a:lstStyle/>
-          <a:p>
-            <a:pPr algn="l"/>
-            <a:r>
-              <a:rPr sz="1100" b="0">
-                <a:solidFill>
-                  <a:srgbClr val="8B6B22"/>
-                </a:solidFill>
-                <a:latin typeface="DM Sans"/>
-              </a:rPr>
-              <a:t>First login, fresh account.</a:t>
-            </a:r>
-          </a:p>
-        </p:txBody>
-      </p:sp>
-      <p:sp>
-        <p:nvSpPr>
-          <p:cNvPr id="8" name="TextBox 7"/>
-          <p:cNvSpPr txBox="1"/>
-          <p:nvPr/>
-        </p:nvSpPr>
-        <p:spPr>
-          <a:xfrm>
-            <a:off x="8000000" y="6500000"/>
-            <a:ext cx="4000000" cy="300000"/>
-          </a:xfrm>
-          <a:prstGeom prst="rect">
-            <a:avLst/>
-          </a:prstGeom>
-          <a:noFill/>
-        </p:spPr>
-        <p:txBody>
-          <a:bodyPr wrap="square">
-            <a:spAutoFit/>
-          </a:bodyPr>
-          <a:lstStyle/>
-          <a:p>
-            <a:pPr algn="r"/>
-            <a:r>
-              <a:rPr sz="1100" b="0">
-                <a:solidFill>
-                  <a:srgbClr val="D8CFBE"/>
-                </a:solidFill>
-                <a:latin typeface="DM Sans"/>
-              </a:rPr>
-              <a:t>03 · Staff Attendance · 05/20</a:t>
+              <a:t>03 · Staff Attendance · 05/15</a:t>
             </a:r>
           </a:p>
         </p:txBody>
@@ -6224,8 +5039,8 @@
         </p:nvSpPr>
         <p:spPr>
           <a:xfrm>
-            <a:off x="1200000" y="2200000"/>
-            <a:ext cx="9700000" cy="1500000"/>
+            <a:off x="800000" y="500000"/>
+            <a:ext cx="10500000" cy="700000"/>
           </a:xfrm>
           <a:prstGeom prst="rect">
             <a:avLst/>
@@ -6238,43 +5053,73 @@
           </a:bodyPr>
           <a:lstStyle/>
           <a:p>
+            <a:pPr algn="l"/>
+            <a:r>
+              <a:rPr sz="3200" b="1">
+                <a:solidFill>
+                  <a:srgbClr val="0E1411"/>
+                </a:solidFill>
+                <a:latin typeface="DM Sans"/>
+              </a:rPr>
+              <a:t>Clock-in, GPS clean</a:t>
+            </a:r>
+          </a:p>
+        </p:txBody>
+      </p:sp>
+      <p:sp>
+        <p:nvSpPr>
+          <p:cNvPr id="3" name="Rectangle 2"/>
+          <p:cNvSpPr/>
+          <p:nvPr/>
+        </p:nvSpPr>
+        <p:spPr>
+          <a:xfrm>
+            <a:off x="800000" y="1500000"/>
+            <a:ext cx="5800000" cy="4500000"/>
+          </a:xfrm>
+          <a:prstGeom prst="rect">
+            <a:avLst/>
+          </a:prstGeom>
+          <a:solidFill>
+            <a:srgbClr val="FBF7EF"/>
+          </a:solidFill>
+          <a:ln>
+            <a:solidFill>
+              <a:srgbClr val="D8CFBE"/>
+            </a:solidFill>
+          </a:ln>
+        </p:spPr>
+        <p:style>
+          <a:lnRef idx="1">
+            <a:schemeClr val="accent1"/>
+          </a:lnRef>
+          <a:fillRef idx="3">
+            <a:schemeClr val="accent1"/>
+          </a:fillRef>
+          <a:effectRef idx="2">
+            <a:schemeClr val="accent1"/>
+          </a:effectRef>
+          <a:fontRef idx="minor">
+            <a:schemeClr val="lt1"/>
+          </a:fontRef>
+        </p:style>
+        <p:txBody>
+          <a:bodyPr rtlCol="0" anchor="ctr"/>
+          <a:lstStyle/>
+          <a:p>
             <a:pPr algn="ctr"/>
             <a:r>
-              <a:rPr sz="4400" b="1">
-                <a:solidFill>
-                  <a:srgbClr val="0E1411"/>
-                </a:solidFill>
-                <a:latin typeface="Playfair Display"/>
+              <a:rPr sz="1100">
+                <a:solidFill>
+                  <a:srgbClr val="8B6B22"/>
+                </a:solidFill>
+                <a:latin typeface="DM Sans"/>
               </a:rPr>
-              <a:t>The 75-metre circle isn't a circle.</a:t>
-            </a:r>
-          </a:p>
-        </p:txBody>
-      </p:sp>
-      <p:pic>
-        <p:nvPicPr>
-          <p:cNvPr id="3" name="Picture 2" descr="gold-deco-hairline.png"/>
-          <p:cNvPicPr>
-            <a:picLocks noChangeAspect="1"/>
-          </p:cNvPicPr>
-          <p:nvPr/>
-        </p:nvPicPr>
-        <p:blipFill>
-          <a:blip r:embed="rId2"/>
-          <a:stretch>
-            <a:fillRect/>
-          </a:stretch>
-        </p:blipFill>
-        <p:spPr>
-          <a:xfrm>
-            <a:off x="5896000" y="3800000"/>
-            <a:ext cx="400000" cy="20000"/>
-          </a:xfrm>
-          <a:prstGeom prst="rect">
-            <a:avLst/>
-          </a:prstGeom>
-        </p:spPr>
-      </p:pic>
+              <a:t>[REPLACE: S08-clockin-success.png]</a:t>
+            </a:r>
+          </a:p>
+        </p:txBody>
+      </p:sp>
       <p:sp>
         <p:nvSpPr>
           <p:cNvPr id="4" name="TextBox 3"/>
@@ -6283,8 +5128,8 @@
         </p:nvSpPr>
         <p:spPr>
           <a:xfrm>
-            <a:off x="1500000" y="4100000"/>
-            <a:ext cx="9100000" cy="1200000"/>
+            <a:off x="7100000" y="1500000"/>
+            <a:ext cx="4200000" cy="1100000"/>
           </a:xfrm>
           <a:prstGeom prst="rect">
             <a:avLst/>
@@ -6297,15 +5142,15 @@
           </a:bodyPr>
           <a:lstStyle/>
           <a:p>
-            <a:pPr algn="ctr"/>
-            <a:r>
-              <a:rPr sz="2200" b="0">
+            <a:pPr algn="l"/>
+            <a:r>
+              <a:rPr sz="1600" b="0">
                 <a:solidFill>
                   <a:srgbClr val="1A1714"/>
                 </a:solidFill>
                 <a:latin typeface="DM Sans"/>
               </a:rPr>
-              <a:t>It's a circle plus your phone's reported GPS accuracy.</a:t>
+              <a:t>①  Accuracy ≤15m, inside fence — instant approval.</a:t>
             </a:r>
           </a:p>
         </p:txBody>
@@ -6318,8 +5163,8 @@
         </p:nvSpPr>
         <p:spPr>
           <a:xfrm>
-            <a:off x="8000000" y="6500000"/>
-            <a:ext cx="4000000" cy="300000"/>
+            <a:off x="7100000" y="2800000"/>
+            <a:ext cx="4200000" cy="1100000"/>
           </a:xfrm>
           <a:prstGeom prst="rect">
             <a:avLst/>
@@ -6332,15 +5177,120 @@
           </a:bodyPr>
           <a:lstStyle/>
           <a:p>
-            <a:pPr algn="r"/>
-            <a:r>
-              <a:rPr sz="1100" b="0">
-                <a:solidFill>
-                  <a:srgbClr val="D8CFBE"/>
+            <a:pPr algn="l"/>
+            <a:r>
+              <a:rPr sz="1600" b="0">
+                <a:solidFill>
+                  <a:srgbClr val="1A1714"/>
                 </a:solidFill>
                 <a:latin typeface="DM Sans"/>
               </a:rPr>
-              <a:t>03 · Staff Attendance · 06/20</a:t>
+              <a:t>②  Camera-verified selfie on capture.</a:t>
+            </a:r>
+          </a:p>
+        </p:txBody>
+      </p:sp>
+      <p:sp>
+        <p:nvSpPr>
+          <p:cNvPr id="6" name="TextBox 5"/>
+          <p:cNvSpPr txBox="1"/>
+          <p:nvPr/>
+        </p:nvSpPr>
+        <p:spPr>
+          <a:xfrm>
+            <a:off x="7100000" y="4100000"/>
+            <a:ext cx="4200000" cy="1100000"/>
+          </a:xfrm>
+          <a:prstGeom prst="rect">
+            <a:avLst/>
+          </a:prstGeom>
+          <a:noFill/>
+        </p:spPr>
+        <p:txBody>
+          <a:bodyPr wrap="square">
+            <a:spAutoFit/>
+          </a:bodyPr>
+          <a:lstStyle/>
+          <a:p>
+            <a:pPr algn="l"/>
+            <a:r>
+              <a:rPr sz="1600" b="0">
+                <a:solidFill>
+                  <a:srgbClr val="1A1714"/>
+                </a:solidFill>
+                <a:latin typeface="DM Sans"/>
+              </a:rPr>
+              <a:t>③  Streak counter ticks.</a:t>
+            </a:r>
+          </a:p>
+        </p:txBody>
+      </p:sp>
+      <p:sp>
+        <p:nvSpPr>
+          <p:cNvPr id="7" name="TextBox 6"/>
+          <p:cNvSpPr txBox="1"/>
+          <p:nvPr/>
+        </p:nvSpPr>
+        <p:spPr>
+          <a:xfrm>
+            <a:off x="800000" y="6100000"/>
+            <a:ext cx="10500000" cy="300000"/>
+          </a:xfrm>
+          <a:prstGeom prst="rect">
+            <a:avLst/>
+          </a:prstGeom>
+          <a:noFill/>
+        </p:spPr>
+        <p:txBody>
+          <a:bodyPr wrap="square">
+            <a:spAutoFit/>
+          </a:bodyPr>
+          <a:lstStyle/>
+          <a:p>
+            <a:pPr algn="l"/>
+            <a:r>
+              <a:rPr sz="1100" b="0">
+                <a:solidFill>
+                  <a:srgbClr val="8B6B22"/>
+                </a:solidFill>
+                <a:latin typeface="DM Sans"/>
+              </a:rPr>
+              <a:t>Typical clock-in, captured live.</a:t>
+            </a:r>
+          </a:p>
+        </p:txBody>
+      </p:sp>
+      <p:sp>
+        <p:nvSpPr>
+          <p:cNvPr id="8" name="TextBox 7"/>
+          <p:cNvSpPr txBox="1"/>
+          <p:nvPr/>
+        </p:nvSpPr>
+        <p:spPr>
+          <a:xfrm>
+            <a:off x="8000000" y="6500000"/>
+            <a:ext cx="4000000" cy="300000"/>
+          </a:xfrm>
+          <a:prstGeom prst="rect">
+            <a:avLst/>
+          </a:prstGeom>
+          <a:noFill/>
+        </p:spPr>
+        <p:txBody>
+          <a:bodyPr wrap="square">
+            <a:spAutoFit/>
+          </a:bodyPr>
+          <a:lstStyle/>
+          <a:p>
+            <a:pPr algn="r"/>
+            <a:r>
+              <a:rPr sz="1100" b="0">
+                <a:solidFill>
+                  <a:srgbClr val="D8CFBE"/>
+                </a:solidFill>
+                <a:latin typeface="DM Sans"/>
+              </a:rPr>
+              <a:t>03 · Staff Attendance · 06/15</a:t>
             </a:r>
           </a:p>
         </p:txBody>
@@ -6401,7 +5351,7 @@
                 </a:solidFill>
                 <a:latin typeface="DM Sans"/>
               </a:rPr>
-              <a:t>Clock-in, GPS clean</a:t>
+              <a:t>Clock-in rejected, clearly</a:t>
             </a:r>
           </a:p>
         </p:txBody>
@@ -6455,7 +5405,7 @@
                 </a:solidFill>
                 <a:latin typeface="DM Sans"/>
               </a:rPr>
-              <a:t>[REPLACE: S08-clockin-success.png]</a:t>
+              <a:t>[REPLACE: S10-clockin-rejected.png]</a:t>
             </a:r>
           </a:p>
         </p:txBody>
@@ -6490,7 +5440,7 @@
                 </a:solidFill>
                 <a:latin typeface="DM Sans"/>
               </a:rPr>
-              <a:t>①  Accuracy ≤15m, inside fence — instant approval.</a:t>
+              <a:t>①  200m+ outside — clear distance shown.</a:t>
             </a:r>
           </a:p>
         </p:txBody>
@@ -6525,7 +5475,7 @@
                 </a:solidFill>
                 <a:latin typeface="DM Sans"/>
               </a:rPr>
-              <a:t>②  Camera-verified selfie on capture.</a:t>
+              <a:t>②  GPS accuracy shown alongside.</a:t>
             </a:r>
           </a:p>
         </p:txBody>
@@ -6560,7 +5510,7 @@
                 </a:solidFill>
                 <a:latin typeface="DM Sans"/>
               </a:rPr>
-              <a:t>③  Streak counter ticks.</a:t>
+              <a:t>③  User knows exactly why and where.</a:t>
             </a:r>
           </a:p>
         </p:txBody>
@@ -6595,7 +5545,7 @@
                 </a:solidFill>
                 <a:latin typeface="DM Sans"/>
               </a:rPr>
-              <a:t>Typical clock-in, captured live.</a:t>
+              <a:t>Honest rejection, captured.</a:t>
             </a:r>
           </a:p>
         </p:txBody>
@@ -6630,7 +5580,7 @@
                 </a:solidFill>
                 <a:latin typeface="DM Sans"/>
               </a:rPr>
-              <a:t>03 · Staff Attendance · 07/20</a:t>
+              <a:t>03 · Staff Attendance · 07/15</a:t>
             </a:r>
           </a:p>
         </p:txBody>
@@ -6649,7 +5599,7 @@
     <p:bg>
       <p:bgPr>
         <a:solidFill>
-          <a:srgbClr val="F6F1E7"/>
+          <a:srgbClr val="0E1411"/>
         </a:solidFill>
         <a:effectLst/>
       </p:bgPr>
@@ -6661,16 +5611,40 @@
         <p:nvPr/>
       </p:nvGrpSpPr>
       <p:grpSpPr/>
-      <p:sp>
-        <p:nvSpPr>
-          <p:cNvPr id="2" name="TextBox 1"/>
+      <p:pic>
+        <p:nvPicPr>
+          <p:cNvPr id="2" name="Picture 1" descr="kente-texture-overlay.png"/>
+          <p:cNvPicPr>
+            <a:picLocks noChangeAspect="1"/>
+          </p:cNvPicPr>
+          <p:nvPr/>
+        </p:nvPicPr>
+        <p:blipFill>
+          <a:blip r:embed="rId2"/>
+          <a:stretch>
+            <a:fillRect/>
+          </a:stretch>
+        </p:blipFill>
+        <p:spPr>
+          <a:xfrm>
+            <a:off x="0" y="0"/>
+            <a:ext cx="12192000" cy="6858000"/>
+          </a:xfrm>
+          <a:prstGeom prst="rect">
+            <a:avLst/>
+          </a:prstGeom>
+        </p:spPr>
+      </p:pic>
+      <p:sp>
+        <p:nvSpPr>
+          <p:cNvPr id="3" name="TextBox 2"/>
           <p:cNvSpPr txBox="1"/>
           <p:nvPr/>
         </p:nvSpPr>
         <p:spPr>
           <a:xfrm>
-            <a:off x="800000" y="500000"/>
-            <a:ext cx="10500000" cy="700000"/>
+            <a:off x="800000" y="1500000"/>
+            <a:ext cx="10500000" cy="3500000"/>
           </a:xfrm>
           <a:prstGeom prst="rect">
             <a:avLst/>
@@ -6683,69 +5657,15 @@
           </a:bodyPr>
           <a:lstStyle/>
           <a:p>
-            <a:pPr algn="l"/>
-            <a:r>
-              <a:rPr sz="3200" b="1">
-                <a:solidFill>
-                  <a:srgbClr val="0E1411"/>
-                </a:solidFill>
-                <a:latin typeface="DM Sans"/>
+            <a:pPr algn="ctr"/>
+            <a:r>
+              <a:rPr sz="22000" b="1">
+                <a:solidFill>
+                  <a:srgbClr val="C9A14A"/>
+                </a:solidFill>
+                <a:latin typeface="Playfair Display"/>
               </a:rPr>
-              <a:t>Clock-in, weak GPS at boundary</a:t>
-            </a:r>
-          </a:p>
-        </p:txBody>
-      </p:sp>
-      <p:sp>
-        <p:nvSpPr>
-          <p:cNvPr id="3" name="Rectangle 2"/>
-          <p:cNvSpPr/>
-          <p:nvPr/>
-        </p:nvSpPr>
-        <p:spPr>
-          <a:xfrm>
-            <a:off x="800000" y="1500000"/>
-            <a:ext cx="5800000" cy="4500000"/>
-          </a:xfrm>
-          <a:prstGeom prst="rect">
-            <a:avLst/>
-          </a:prstGeom>
-          <a:solidFill>
-            <a:srgbClr val="FBF7EF"/>
-          </a:solidFill>
-          <a:ln>
-            <a:solidFill>
-              <a:srgbClr val="D8CFBE"/>
-            </a:solidFill>
-          </a:ln>
-        </p:spPr>
-        <p:style>
-          <a:lnRef idx="1">
-            <a:schemeClr val="accent1"/>
-          </a:lnRef>
-          <a:fillRef idx="3">
-            <a:schemeClr val="accent1"/>
-          </a:fillRef>
-          <a:effectRef idx="2">
-            <a:schemeClr val="accent1"/>
-          </a:effectRef>
-          <a:fontRef idx="minor">
-            <a:schemeClr val="lt1"/>
-          </a:fontRef>
-        </p:style>
-        <p:txBody>
-          <a:bodyPr rtlCol="0" anchor="ctr"/>
-          <a:lstStyle/>
-          <a:p>
-            <a:pPr algn="ctr"/>
-            <a:r>
-              <a:rPr sz="1100">
-                <a:solidFill>
-                  <a:srgbClr val="8B6B22"/>
-                </a:solidFill>
-                <a:latin typeface="DM Sans"/>
-              </a:rPr>
-              <a:t>[REPLACE: S09-clockin-weak-gps.png]</a:t>
+              <a:t>&lt;N04&gt;</a:t>
             </a:r>
           </a:p>
         </p:txBody>
@@ -6758,8 +5678,8 @@
         </p:nvSpPr>
         <p:spPr>
           <a:xfrm>
-            <a:off x="7100000" y="1500000"/>
-            <a:ext cx="4200000" cy="1100000"/>
+            <a:off x="800000" y="5300000"/>
+            <a:ext cx="10500000" cy="700000"/>
           </a:xfrm>
           <a:prstGeom prst="rect">
             <a:avLst/>
@@ -6772,15 +5692,15 @@
           </a:bodyPr>
           <a:lstStyle/>
           <a:p>
-            <a:pPr algn="l"/>
-            <a:r>
-              <a:rPr sz="1600" b="0">
-                <a:solidFill>
-                  <a:srgbClr val="1A1714"/>
+            <a:pPr algn="ctr"/>
+            <a:r>
+              <a:rPr sz="2800" b="0">
+                <a:solidFill>
+                  <a:srgbClr val="F6F1E7"/>
                 </a:solidFill>
                 <a:latin typeface="DM Sans"/>
               </a:rPr>
-              <a:t>①  Accuracy ~40m at the edge — accepted.</a:t>
+              <a:t>First-try success rate inside the geofence.</a:t>
             </a:r>
           </a:p>
         </p:txBody>
@@ -6793,8 +5713,8 @@
         </p:nvSpPr>
         <p:spPr>
           <a:xfrm>
-            <a:off x="7100000" y="2800000"/>
-            <a:ext cx="4200000" cy="1100000"/>
+            <a:off x="8000000" y="6500000"/>
+            <a:ext cx="4000000" cy="300000"/>
           </a:xfrm>
           <a:prstGeom prst="rect">
             <a:avLst/>
@@ -6807,120 +5727,15 @@
           </a:bodyPr>
           <a:lstStyle/>
           <a:p>
-            <a:pPr algn="l"/>
-            <a:r>
-              <a:rPr sz="1600" b="0">
-                <a:solidFill>
-                  <a:srgbClr val="1A1714"/>
+            <a:pPr algn="r"/>
+            <a:r>
+              <a:rPr sz="1100" b="0">
+                <a:solidFill>
+                  <a:srgbClr val="D8CFBE"/>
                 </a:solidFill>
                 <a:latin typeface="DM Sans"/>
               </a:rPr>
-              <a:t>②  Buffer scales with reported accuracy.</a:t>
-            </a:r>
-          </a:p>
-        </p:txBody>
-      </p:sp>
-      <p:sp>
-        <p:nvSpPr>
-          <p:cNvPr id="6" name="TextBox 5"/>
-          <p:cNvSpPr txBox="1"/>
-          <p:nvPr/>
-        </p:nvSpPr>
-        <p:spPr>
-          <a:xfrm>
-            <a:off x="7100000" y="4100000"/>
-            <a:ext cx="4200000" cy="1100000"/>
-          </a:xfrm>
-          <a:prstGeom prst="rect">
-            <a:avLst/>
-          </a:prstGeom>
-          <a:noFill/>
-        </p:spPr>
-        <p:txBody>
-          <a:bodyPr wrap="square">
-            <a:spAutoFit/>
-          </a:bodyPr>
-          <a:lstStyle/>
-          <a:p>
-            <a:pPr algn="l"/>
-            <a:r>
-              <a:rPr sz="1600" b="0">
-                <a:solidFill>
-                  <a:srgbClr val="1A1714"/>
-                </a:solidFill>
-                <a:latin typeface="DM Sans"/>
-              </a:rPr>
-              <a:t>③  Real users in real buildings get through.</a:t>
-            </a:r>
-          </a:p>
-        </p:txBody>
-      </p:sp>
-      <p:sp>
-        <p:nvSpPr>
-          <p:cNvPr id="7" name="TextBox 6"/>
-          <p:cNvSpPr txBox="1"/>
-          <p:nvPr/>
-        </p:nvSpPr>
-        <p:spPr>
-          <a:xfrm>
-            <a:off x="800000" y="6100000"/>
-            <a:ext cx="10500000" cy="300000"/>
-          </a:xfrm>
-          <a:prstGeom prst="rect">
-            <a:avLst/>
-          </a:prstGeom>
-          <a:noFill/>
-        </p:spPr>
-        <p:txBody>
-          <a:bodyPr wrap="square">
-            <a:spAutoFit/>
-          </a:bodyPr>
-          <a:lstStyle/>
-          <a:p>
-            <a:pPr algn="l"/>
-            <a:r>
-              <a:rPr sz="1100" b="0">
-                <a:solidFill>
-                  <a:srgbClr val="8B6B22"/>
-                </a:solidFill>
-                <a:latin typeface="DM Sans"/>
-              </a:rPr>
-              <a:t>Edge case, validated.</a:t>
-            </a:r>
-          </a:p>
-        </p:txBody>
-      </p:sp>
-      <p:sp>
-        <p:nvSpPr>
-          <p:cNvPr id="8" name="TextBox 7"/>
-          <p:cNvSpPr txBox="1"/>
-          <p:nvPr/>
-        </p:nvSpPr>
-        <p:spPr>
-          <a:xfrm>
-            <a:off x="8000000" y="6500000"/>
-            <a:ext cx="4000000" cy="300000"/>
-          </a:xfrm>
-          <a:prstGeom prst="rect">
-            <a:avLst/>
-          </a:prstGeom>
-          <a:noFill/>
-        </p:spPr>
-        <p:txBody>
-          <a:bodyPr wrap="square">
-            <a:spAutoFit/>
-          </a:bodyPr>
-          <a:lstStyle/>
-          <a:p>
-            <a:pPr algn="r"/>
-            <a:r>
-              <a:rPr sz="1100" b="0">
-                <a:solidFill>
-                  <a:srgbClr val="D8CFBE"/>
-                </a:solidFill>
-                <a:latin typeface="DM Sans"/>
-              </a:rPr>
-              <a:t>03 · Staff Attendance · 08/20</a:t>
+              <a:t>03 · Staff Attendance · 08/15</a:t>
             </a:r>
           </a:p>
         </p:txBody>
@@ -6959,8 +5774,8 @@
         </p:nvSpPr>
         <p:spPr>
           <a:xfrm>
-            <a:off x="800000" y="500000"/>
-            <a:ext cx="10500000" cy="700000"/>
+            <a:off x="1200000" y="2200000"/>
+            <a:ext cx="9700000" cy="1500000"/>
           </a:xfrm>
           <a:prstGeom prst="rect">
             <a:avLst/>
@@ -6973,73 +5788,43 @@
           </a:bodyPr>
           <a:lstStyle/>
           <a:p>
-            <a:pPr algn="l"/>
-            <a:r>
-              <a:rPr sz="3200" b="1">
+            <a:pPr algn="ctr"/>
+            <a:r>
+              <a:rPr sz="4400" b="1">
                 <a:solidFill>
                   <a:srgbClr val="0E1411"/>
                 </a:solidFill>
-                <a:latin typeface="DM Sans"/>
+                <a:latin typeface="Playfair Display"/>
               </a:rPr>
-              <a:t>Clock-in rejected, clearly</a:t>
-            </a:r>
-          </a:p>
-        </p:txBody>
-      </p:sp>
-      <p:sp>
-        <p:nvSpPr>
-          <p:cNvPr id="3" name="Rectangle 2"/>
-          <p:cNvSpPr/>
-          <p:nvPr/>
-        </p:nvSpPr>
-        <p:spPr>
-          <a:xfrm>
-            <a:off x="800000" y="1500000"/>
-            <a:ext cx="5800000" cy="4500000"/>
-          </a:xfrm>
-          <a:prstGeom prst="rect">
-            <a:avLst/>
-          </a:prstGeom>
-          <a:solidFill>
-            <a:srgbClr val="FBF7EF"/>
-          </a:solidFill>
-          <a:ln>
-            <a:solidFill>
-              <a:srgbClr val="D8CFBE"/>
-            </a:solidFill>
-          </a:ln>
-        </p:spPr>
-        <p:style>
-          <a:lnRef idx="1">
-            <a:schemeClr val="accent1"/>
-          </a:lnRef>
-          <a:fillRef idx="3">
-            <a:schemeClr val="accent1"/>
-          </a:fillRef>
-          <a:effectRef idx="2">
-            <a:schemeClr val="accent1"/>
-          </a:effectRef>
-          <a:fontRef idx="minor">
-            <a:schemeClr val="lt1"/>
-          </a:fontRef>
-        </p:style>
-        <p:txBody>
-          <a:bodyPr rtlCol="0" anchor="ctr"/>
-          <a:lstStyle/>
-          <a:p>
-            <a:pPr algn="ctr"/>
-            <a:r>
-              <a:rPr sz="1100">
-                <a:solidFill>
-                  <a:srgbClr val="8B6B22"/>
-                </a:solidFill>
-                <a:latin typeface="DM Sans"/>
-              </a:rPr>
-              <a:t>[REPLACE: S10-clockin-rejected.png]</a:t>
-            </a:r>
-          </a:p>
-        </p:txBody>
-      </p:sp>
+              <a:t>Streaks turn habit into recognition.</a:t>
+            </a:r>
+          </a:p>
+        </p:txBody>
+      </p:sp>
+      <p:pic>
+        <p:nvPicPr>
+          <p:cNvPr id="3" name="Picture 2" descr="gold-deco-hairline.png"/>
+          <p:cNvPicPr>
+            <a:picLocks noChangeAspect="1"/>
+          </p:cNvPicPr>
+          <p:nvPr/>
+        </p:nvPicPr>
+        <p:blipFill>
+          <a:blip r:embed="rId2"/>
+          <a:stretch>
+            <a:fillRect/>
+          </a:stretch>
+        </p:blipFill>
+        <p:spPr>
+          <a:xfrm>
+            <a:off x="5896000" y="3800000"/>
+            <a:ext cx="400000" cy="20000"/>
+          </a:xfrm>
+          <a:prstGeom prst="rect">
+            <a:avLst/>
+          </a:prstGeom>
+        </p:spPr>
+      </p:pic>
       <p:sp>
         <p:nvSpPr>
           <p:cNvPr id="4" name="TextBox 3"/>
@@ -7048,8 +5833,8 @@
         </p:nvSpPr>
         <p:spPr>
           <a:xfrm>
-            <a:off x="7100000" y="1500000"/>
-            <a:ext cx="4200000" cy="1100000"/>
+            <a:off x="1500000" y="4100000"/>
+            <a:ext cx="9100000" cy="1200000"/>
           </a:xfrm>
           <a:prstGeom prst="rect">
             <a:avLst/>
@@ -7062,15 +5847,15 @@
           </a:bodyPr>
           <a:lstStyle/>
           <a:p>
-            <a:pPr algn="l"/>
-            <a:r>
-              <a:rPr sz="1600" b="0">
+            <a:pPr algn="ctr"/>
+            <a:r>
+              <a:rPr sz="2200" b="0">
                 <a:solidFill>
                   <a:srgbClr val="1A1714"/>
                 </a:solidFill>
                 <a:latin typeface="DM Sans"/>
               </a:rPr>
-              <a:t>①  200m+ outside — clear distance shown.</a:t>
+              <a:t>Consecutive working-day counter. "Best-ever" stays remembered.</a:t>
             </a:r>
           </a:p>
         </p:txBody>
@@ -7083,8 +5868,8 @@
         </p:nvSpPr>
         <p:spPr>
           <a:xfrm>
-            <a:off x="7100000" y="2800000"/>
-            <a:ext cx="4200000" cy="1100000"/>
+            <a:off x="8000000" y="6500000"/>
+            <a:ext cx="4000000" cy="300000"/>
           </a:xfrm>
           <a:prstGeom prst="rect">
             <a:avLst/>
@@ -7097,120 +5882,15 @@
           </a:bodyPr>
           <a:lstStyle/>
           <a:p>
-            <a:pPr algn="l"/>
-            <a:r>
-              <a:rPr sz="1600" b="0">
-                <a:solidFill>
-                  <a:srgbClr val="1A1714"/>
+            <a:pPr algn="r"/>
+            <a:r>
+              <a:rPr sz="1100" b="0">
+                <a:solidFill>
+                  <a:srgbClr val="D8CFBE"/>
                 </a:solidFill>
                 <a:latin typeface="DM Sans"/>
               </a:rPr>
-              <a:t>②  GPS accuracy shown alongside.</a:t>
-            </a:r>
-          </a:p>
-        </p:txBody>
-      </p:sp>
-      <p:sp>
-        <p:nvSpPr>
-          <p:cNvPr id="6" name="TextBox 5"/>
-          <p:cNvSpPr txBox="1"/>
-          <p:nvPr/>
-        </p:nvSpPr>
-        <p:spPr>
-          <a:xfrm>
-            <a:off x="7100000" y="4100000"/>
-            <a:ext cx="4200000" cy="1100000"/>
-          </a:xfrm>
-          <a:prstGeom prst="rect">
-            <a:avLst/>
-          </a:prstGeom>
-          <a:noFill/>
-        </p:spPr>
-        <p:txBody>
-          <a:bodyPr wrap="square">
-            <a:spAutoFit/>
-          </a:bodyPr>
-          <a:lstStyle/>
-          <a:p>
-            <a:pPr algn="l"/>
-            <a:r>
-              <a:rPr sz="1600" b="0">
-                <a:solidFill>
-                  <a:srgbClr val="1A1714"/>
-                </a:solidFill>
-                <a:latin typeface="DM Sans"/>
-              </a:rPr>
-              <a:t>③  User knows exactly why and where.</a:t>
-            </a:r>
-          </a:p>
-        </p:txBody>
-      </p:sp>
-      <p:sp>
-        <p:nvSpPr>
-          <p:cNvPr id="7" name="TextBox 6"/>
-          <p:cNvSpPr txBox="1"/>
-          <p:nvPr/>
-        </p:nvSpPr>
-        <p:spPr>
-          <a:xfrm>
-            <a:off x="800000" y="6100000"/>
-            <a:ext cx="10500000" cy="300000"/>
-          </a:xfrm>
-          <a:prstGeom prst="rect">
-            <a:avLst/>
-          </a:prstGeom>
-          <a:noFill/>
-        </p:spPr>
-        <p:txBody>
-          <a:bodyPr wrap="square">
-            <a:spAutoFit/>
-          </a:bodyPr>
-          <a:lstStyle/>
-          <a:p>
-            <a:pPr algn="l"/>
-            <a:r>
-              <a:rPr sz="1100" b="0">
-                <a:solidFill>
-                  <a:srgbClr val="8B6B22"/>
-                </a:solidFill>
-                <a:latin typeface="DM Sans"/>
-              </a:rPr>
-              <a:t>Honest rejection, captured.</a:t>
-            </a:r>
-          </a:p>
-        </p:txBody>
-      </p:sp>
-      <p:sp>
-        <p:nvSpPr>
-          <p:cNvPr id="8" name="TextBox 7"/>
-          <p:cNvSpPr txBox="1"/>
-          <p:nvPr/>
-        </p:nvSpPr>
-        <p:spPr>
-          <a:xfrm>
-            <a:off x="8000000" y="6500000"/>
-            <a:ext cx="4000000" cy="300000"/>
-          </a:xfrm>
-          <a:prstGeom prst="rect">
-            <a:avLst/>
-          </a:prstGeom>
-          <a:noFill/>
-        </p:spPr>
-        <p:txBody>
-          <a:bodyPr wrap="square">
-            <a:spAutoFit/>
-          </a:bodyPr>
-          <a:lstStyle/>
-          <a:p>
-            <a:pPr algn="r"/>
-            <a:r>
-              <a:rPr sz="1100" b="0">
-                <a:solidFill>
-                  <a:srgbClr val="D8CFBE"/>
-                </a:solidFill>
-                <a:latin typeface="DM Sans"/>
-              </a:rPr>
-              <a:t>03 · Staff Attendance · 09/20</a:t>
+              <a:t>03 · Staff Attendance · 09/15</a:t>
             </a:r>
           </a:p>
         </p:txBody>
